--- a/output_pptx/Forever_Reign.pptx
+++ b/output_pptx/Forever_Reign.pptx
@@ -3131,23 +3131,23 @@
         </p:nvSpPr>
         <p:spPr>
           <a:xfrm>
-            <a:off x="594360" y="2258568"/>
-            <a:ext cx="11002975" cy="685800"/>
-          </a:xfrm>
-          <a:prstGeom prst="rect">
-            <a:avLst/>
-          </a:prstGeom>
-          <a:noFill/>
-        </p:spPr>
-        <p:txBody>
-          <a:bodyPr wrap="square">
-            <a:spAutoFit/>
-          </a:bodyPr>
-          <a:lstStyle/>
-          <a:p>
-            <a:pPr algn="ctr"/>
-            <a:r>
-              <a:rPr sz="4400" b="1" i="0">
+            <a:off x="640080" y="2052828"/>
+            <a:ext cx="10911535" cy="731520"/>
+          </a:xfrm>
+          <a:prstGeom prst="rect">
+            <a:avLst/>
+          </a:prstGeom>
+          <a:noFill/>
+        </p:spPr>
+        <p:txBody>
+          <a:bodyPr wrap="square">
+            <a:spAutoFit/>
+          </a:bodyPr>
+          <a:lstStyle/>
+          <a:p>
+            <a:pPr algn="ctr"/>
+            <a:r>
+              <a:rPr sz="4800" b="1" i="0">
                 <a:solidFill>
                   <a:srgbClr val="FFFFFF"/>
                 </a:solidFill>
@@ -3166,99 +3166,29 @@
         </p:nvSpPr>
         <p:spPr>
           <a:xfrm>
-            <a:off x="594360" y="2980944"/>
-            <a:ext cx="11002975" cy="347472"/>
-          </a:xfrm>
-          <a:prstGeom prst="rect">
-            <a:avLst/>
-          </a:prstGeom>
-          <a:noFill/>
-        </p:spPr>
-        <p:txBody>
-          <a:bodyPr wrap="square">
-            <a:spAutoFit/>
-          </a:bodyPr>
-          <a:lstStyle/>
-          <a:p>
-            <a:pPr algn="ctr"/>
-            <a:r>
-              <a:rPr sz="2200" b="0" i="1">
-                <a:solidFill>
-                  <a:srgbClr val="8C8C8C"/>
-                </a:solidFill>
-                <a:latin typeface="Arial"/>
-              </a:rPr>
-              <a:t/>
-            </a:r>
-          </a:p>
-        </p:txBody>
-      </p:sp>
-      <p:sp>
-        <p:nvSpPr>
-          <p:cNvPr id="4" name="TextBox 3"/>
-          <p:cNvSpPr txBox="1"/>
-          <p:nvPr/>
-        </p:nvSpPr>
-        <p:spPr>
-          <a:xfrm>
-            <a:off x="594360" y="3529584"/>
-            <a:ext cx="11002975" cy="685800"/>
-          </a:xfrm>
-          <a:prstGeom prst="rect">
-            <a:avLst/>
-          </a:prstGeom>
-          <a:noFill/>
-        </p:spPr>
-        <p:txBody>
-          <a:bodyPr wrap="square">
-            <a:spAutoFit/>
-          </a:bodyPr>
-          <a:lstStyle/>
-          <a:p>
-            <a:pPr algn="ctr"/>
-            <a:r>
-              <a:rPr sz="4400" b="1" i="0">
+            <a:off x="640080" y="2985516"/>
+            <a:ext cx="10911535" cy="731520"/>
+          </a:xfrm>
+          <a:prstGeom prst="rect">
+            <a:avLst/>
+          </a:prstGeom>
+          <a:noFill/>
+        </p:spPr>
+        <p:txBody>
+          <a:bodyPr wrap="square">
+            <a:spAutoFit/>
+          </a:bodyPr>
+          <a:lstStyle/>
+          <a:p>
+            <a:pPr algn="ctr"/>
+            <a:r>
+              <a:rPr sz="4800" b="1" i="0">
                 <a:solidFill>
                   <a:srgbClr val="FFFFFF"/>
                 </a:solidFill>
                 <a:latin typeface="Arial"/>
               </a:rPr>
               <a:t>Quando não há nada de bom em mim</a:t>
-            </a:r>
-          </a:p>
-        </p:txBody>
-      </p:sp>
-      <p:sp>
-        <p:nvSpPr>
-          <p:cNvPr id="5" name="TextBox 4"/>
-          <p:cNvSpPr txBox="1"/>
-          <p:nvPr/>
-        </p:nvSpPr>
-        <p:spPr>
-          <a:xfrm>
-            <a:off x="594360" y="4251960"/>
-            <a:ext cx="11002975" cy="347472"/>
-          </a:xfrm>
-          <a:prstGeom prst="rect">
-            <a:avLst/>
-          </a:prstGeom>
-          <a:noFill/>
-        </p:spPr>
-        <p:txBody>
-          <a:bodyPr wrap="square">
-            <a:spAutoFit/>
-          </a:bodyPr>
-          <a:lstStyle/>
-          <a:p>
-            <a:pPr algn="ctr"/>
-            <a:r>
-              <a:rPr sz="2200" b="0" i="1">
-                <a:solidFill>
-                  <a:srgbClr val="8C8C8C"/>
-                </a:solidFill>
-                <a:latin typeface="Arial"/>
-              </a:rPr>
-              <a:t/>
             </a:r>
           </a:p>
         </p:txBody>
@@ -3297,64 +3227,29 @@
         </p:nvSpPr>
         <p:spPr>
           <a:xfrm>
-            <a:off x="594360" y="2894076"/>
-            <a:ext cx="11002975" cy="685800"/>
-          </a:xfrm>
-          <a:prstGeom prst="rect">
-            <a:avLst/>
-          </a:prstGeom>
-          <a:noFill/>
-        </p:spPr>
-        <p:txBody>
-          <a:bodyPr wrap="square">
-            <a:spAutoFit/>
-          </a:bodyPr>
-          <a:lstStyle/>
-          <a:p>
-            <a:pPr algn="ctr"/>
-            <a:r>
-              <a:rPr sz="4400" b="1" i="0">
+            <a:off x="640080" y="2702052"/>
+            <a:ext cx="10911535" cy="731520"/>
+          </a:xfrm>
+          <a:prstGeom prst="rect">
+            <a:avLst/>
+          </a:prstGeom>
+          <a:noFill/>
+        </p:spPr>
+        <p:txBody>
+          <a:bodyPr wrap="square">
+            <a:spAutoFit/>
+          </a:bodyPr>
+          <a:lstStyle/>
+          <a:p>
+            <a:pPr algn="ctr"/>
+            <a:r>
+              <a:rPr sz="4800" b="1" i="0">
                 <a:solidFill>
                   <a:srgbClr val="FFFFFF"/>
                 </a:solidFill>
                 <a:latin typeface="Arial"/>
               </a:rPr>
               <a:t>Tu és a vida, Tu és a vida</a:t>
-            </a:r>
-          </a:p>
-        </p:txBody>
-      </p:sp>
-      <p:sp>
-        <p:nvSpPr>
-          <p:cNvPr id="3" name="TextBox 2"/>
-          <p:cNvSpPr txBox="1"/>
-          <p:nvPr/>
-        </p:nvSpPr>
-        <p:spPr>
-          <a:xfrm>
-            <a:off x="594360" y="3616452"/>
-            <a:ext cx="11002975" cy="347472"/>
-          </a:xfrm>
-          <a:prstGeom prst="rect">
-            <a:avLst/>
-          </a:prstGeom>
-          <a:noFill/>
-        </p:spPr>
-        <p:txBody>
-          <a:bodyPr wrap="square">
-            <a:spAutoFit/>
-          </a:bodyPr>
-          <a:lstStyle/>
-          <a:p>
-            <a:pPr algn="ctr"/>
-            <a:r>
-              <a:rPr sz="2200" b="0" i="1">
-                <a:solidFill>
-                  <a:srgbClr val="8C8C8C"/>
-                </a:solidFill>
-                <a:latin typeface="Arial"/>
-              </a:rPr>
-              <a:t/>
             </a:r>
           </a:p>
         </p:txBody>
@@ -3393,23 +3288,23 @@
         </p:nvSpPr>
         <p:spPr>
           <a:xfrm>
-            <a:off x="594360" y="2258568"/>
-            <a:ext cx="11002975" cy="685800"/>
-          </a:xfrm>
-          <a:prstGeom prst="rect">
-            <a:avLst/>
-          </a:prstGeom>
-          <a:noFill/>
-        </p:spPr>
-        <p:txBody>
-          <a:bodyPr wrap="square">
-            <a:spAutoFit/>
-          </a:bodyPr>
-          <a:lstStyle/>
-          <a:p>
-            <a:pPr algn="ctr"/>
-            <a:r>
-              <a:rPr sz="4141" b="1" i="0">
+            <a:off x="640080" y="2052828"/>
+            <a:ext cx="10911535" cy="731520"/>
+          </a:xfrm>
+          <a:prstGeom prst="rect">
+            <a:avLst/>
+          </a:prstGeom>
+          <a:noFill/>
+        </p:spPr>
+        <p:txBody>
+          <a:bodyPr wrap="square">
+            <a:spAutoFit/>
+          </a:bodyPr>
+          <a:lstStyle/>
+          <a:p>
+            <a:pPr algn="ctr"/>
+            <a:r>
+              <a:rPr sz="4500" b="1" i="0">
                 <a:solidFill>
                   <a:srgbClr val="FFFFFF"/>
                 </a:solidFill>
@@ -3428,25 +3323,60 @@
         </p:nvSpPr>
         <p:spPr>
           <a:xfrm>
-            <a:off x="594360" y="2980944"/>
-            <a:ext cx="11002975" cy="347472"/>
-          </a:xfrm>
-          <a:prstGeom prst="rect">
-            <a:avLst/>
-          </a:prstGeom>
-          <a:noFill/>
-        </p:spPr>
-        <p:txBody>
-          <a:bodyPr wrap="square">
-            <a:spAutoFit/>
-          </a:bodyPr>
-          <a:lstStyle/>
-          <a:p>
-            <a:pPr algn="ctr"/>
-            <a:r>
-              <a:rPr sz="2200" b="0" i="1">
-                <a:solidFill>
-                  <a:srgbClr val="8C8C8C"/>
+            <a:off x="640080" y="2985516"/>
+            <a:ext cx="10911535" cy="731520"/>
+          </a:xfrm>
+          <a:prstGeom prst="rect">
+            <a:avLst/>
+          </a:prstGeom>
+          <a:noFill/>
+        </p:spPr>
+        <p:txBody>
+          <a:bodyPr wrap="square">
+            <a:spAutoFit/>
+          </a:bodyPr>
+          <a:lstStyle/>
+          <a:p>
+            <a:pPr algn="ctr"/>
+            <a:r>
+              <a:rPr sz="4000" b="1" i="0">
+                <a:solidFill>
+                  <a:srgbClr val="FFFFFF"/>
+                </a:solidFill>
+                <a:latin typeface="Arial"/>
+              </a:rPr>
+              <a:t>Oh, estou correndo para os Teus braços</a:t>
+            </a:r>
+          </a:p>
+        </p:txBody>
+      </p:sp>
+      <p:sp>
+        <p:nvSpPr>
+          <p:cNvPr id="4" name="TextBox 3"/>
+          <p:cNvSpPr txBox="1"/>
+          <p:nvPr/>
+        </p:nvSpPr>
+        <p:spPr>
+          <a:xfrm>
+            <a:off x="640080" y="4128516"/>
+            <a:ext cx="10911535" cy="310896"/>
+          </a:xfrm>
+          <a:prstGeom prst="rect">
+            <a:avLst/>
+          </a:prstGeom>
+          <a:noFill/>
+        </p:spPr>
+        <p:txBody>
+          <a:bodyPr wrap="square">
+            <a:spAutoFit/>
+          </a:bodyPr>
+          <a:lstStyle/>
+          <a:p>
+            <a:pPr algn="ctr"/>
+            <a:r>
+              <a:rPr sz="2000" b="0" i="0">
+                <a:solidFill>
+                  <a:srgbClr val="828282"/>
                 </a:solidFill>
                 <a:latin typeface="Arial"/>
               </a:rPr>
@@ -3457,66 +3387,31 @@
       </p:sp>
       <p:sp>
         <p:nvSpPr>
-          <p:cNvPr id="4" name="TextBox 3"/>
-          <p:cNvSpPr txBox="1"/>
-          <p:nvPr/>
-        </p:nvSpPr>
-        <p:spPr>
-          <a:xfrm>
-            <a:off x="594360" y="3529584"/>
-            <a:ext cx="11002975" cy="685800"/>
-          </a:xfrm>
-          <a:prstGeom prst="rect">
-            <a:avLst/>
-          </a:prstGeom>
-          <a:noFill/>
-        </p:spPr>
-        <p:txBody>
-          <a:bodyPr wrap="square">
-            <a:spAutoFit/>
-          </a:bodyPr>
-          <a:lstStyle/>
-          <a:p>
-            <a:pPr algn="ctr"/>
-            <a:r>
-              <a:rPr sz="3705" b="1" i="0">
-                <a:solidFill>
-                  <a:srgbClr val="FFFFFF"/>
-                </a:solidFill>
-                <a:latin typeface="Arial"/>
-              </a:rPr>
-              <a:t>Oh, estou correndo para os Teus braços</a:t>
-            </a:r>
-          </a:p>
-        </p:txBody>
-      </p:sp>
-      <p:sp>
-        <p:nvSpPr>
           <p:cNvPr id="5" name="TextBox 4"/>
           <p:cNvSpPr txBox="1"/>
           <p:nvPr/>
         </p:nvSpPr>
         <p:spPr>
           <a:xfrm>
-            <a:off x="594360" y="4251960"/>
-            <a:ext cx="11002975" cy="347472"/>
-          </a:xfrm>
-          <a:prstGeom prst="rect">
-            <a:avLst/>
-          </a:prstGeom>
-          <a:noFill/>
-        </p:spPr>
-        <p:txBody>
-          <a:bodyPr wrap="square">
-            <a:spAutoFit/>
-          </a:bodyPr>
-          <a:lstStyle/>
-          <a:p>
-            <a:pPr algn="ctr"/>
-            <a:r>
-              <a:rPr sz="2200" b="0" i="1">
-                <a:solidFill>
-                  <a:srgbClr val="8C8C8C"/>
+            <a:off x="640080" y="4494276"/>
+            <a:ext cx="10911535" cy="310896"/>
+          </a:xfrm>
+          <a:prstGeom prst="rect">
+            <a:avLst/>
+          </a:prstGeom>
+          <a:noFill/>
+        </p:spPr>
+        <p:txBody>
+          <a:bodyPr wrap="square">
+            <a:spAutoFit/>
+          </a:bodyPr>
+          <a:lstStyle/>
+          <a:p>
+            <a:pPr algn="ctr"/>
+            <a:r>
+              <a:rPr sz="2000" b="0" i="0">
+                <a:solidFill>
+                  <a:srgbClr val="828282"/>
                 </a:solidFill>
                 <a:latin typeface="Arial"/>
               </a:rPr>
@@ -3559,23 +3454,23 @@
         </p:nvSpPr>
         <p:spPr>
           <a:xfrm>
-            <a:off x="594360" y="2258568"/>
-            <a:ext cx="11002975" cy="685800"/>
-          </a:xfrm>
-          <a:prstGeom prst="rect">
-            <a:avLst/>
-          </a:prstGeom>
-          <a:noFill/>
-        </p:spPr>
-        <p:txBody>
-          <a:bodyPr wrap="square">
-            <a:spAutoFit/>
-          </a:bodyPr>
-          <a:lstStyle/>
-          <a:p>
-            <a:pPr algn="ctr"/>
-            <a:r>
-              <a:rPr sz="4141" b="1" i="0">
+            <a:off x="640080" y="2052828"/>
+            <a:ext cx="10911535" cy="731520"/>
+          </a:xfrm>
+          <a:prstGeom prst="rect">
+            <a:avLst/>
+          </a:prstGeom>
+          <a:noFill/>
+        </p:spPr>
+        <p:txBody>
+          <a:bodyPr wrap="square">
+            <a:spAutoFit/>
+          </a:bodyPr>
+          <a:lstStyle/>
+          <a:p>
+            <a:pPr algn="ctr"/>
+            <a:r>
+              <a:rPr sz="4500" b="1" i="0">
                 <a:solidFill>
                   <a:srgbClr val="FFFFFF"/>
                 </a:solidFill>
@@ -3594,25 +3489,60 @@
         </p:nvSpPr>
         <p:spPr>
           <a:xfrm>
-            <a:off x="594360" y="2980944"/>
-            <a:ext cx="11002975" cy="347472"/>
-          </a:xfrm>
-          <a:prstGeom prst="rect">
-            <a:avLst/>
-          </a:prstGeom>
-          <a:noFill/>
-        </p:spPr>
-        <p:txBody>
-          <a:bodyPr wrap="square">
-            <a:spAutoFit/>
-          </a:bodyPr>
-          <a:lstStyle/>
-          <a:p>
-            <a:pPr algn="ctr"/>
-            <a:r>
-              <a:rPr sz="2200" b="0" i="1">
-                <a:solidFill>
-                  <a:srgbClr val="8C8C8C"/>
+            <a:off x="640080" y="2985516"/>
+            <a:ext cx="10911535" cy="731520"/>
+          </a:xfrm>
+          <a:prstGeom prst="rect">
+            <a:avLst/>
+          </a:prstGeom>
+          <a:noFill/>
+        </p:spPr>
+        <p:txBody>
+          <a:bodyPr wrap="square">
+            <a:spAutoFit/>
+          </a:bodyPr>
+          <a:lstStyle/>
+          <a:p>
+            <a:pPr algn="ctr"/>
+            <a:r>
+              <a:rPr sz="4800" b="1" i="0">
+                <a:solidFill>
+                  <a:srgbClr val="FFFFFF"/>
+                </a:solidFill>
+                <a:latin typeface="Arial"/>
+              </a:rPr>
+              <a:t>A riqueza do Teu amor</a:t>
+            </a:r>
+          </a:p>
+        </p:txBody>
+      </p:sp>
+      <p:sp>
+        <p:nvSpPr>
+          <p:cNvPr id="4" name="TextBox 3"/>
+          <p:cNvSpPr txBox="1"/>
+          <p:nvPr/>
+        </p:nvSpPr>
+        <p:spPr>
+          <a:xfrm>
+            <a:off x="640080" y="4128516"/>
+            <a:ext cx="10911535" cy="310896"/>
+          </a:xfrm>
+          <a:prstGeom prst="rect">
+            <a:avLst/>
+          </a:prstGeom>
+          <a:noFill/>
+        </p:spPr>
+        <p:txBody>
+          <a:bodyPr wrap="square">
+            <a:spAutoFit/>
+          </a:bodyPr>
+          <a:lstStyle/>
+          <a:p>
+            <a:pPr algn="ctr"/>
+            <a:r>
+              <a:rPr sz="2000" b="0" i="0">
+                <a:solidFill>
+                  <a:srgbClr val="828282"/>
                 </a:solidFill>
                 <a:latin typeface="Arial"/>
               </a:rPr>
@@ -3623,66 +3553,31 @@
       </p:sp>
       <p:sp>
         <p:nvSpPr>
-          <p:cNvPr id="4" name="TextBox 3"/>
-          <p:cNvSpPr txBox="1"/>
-          <p:nvPr/>
-        </p:nvSpPr>
-        <p:spPr>
-          <a:xfrm>
-            <a:off x="594360" y="3529584"/>
-            <a:ext cx="11002975" cy="685800"/>
-          </a:xfrm>
-          <a:prstGeom prst="rect">
-            <a:avLst/>
-          </a:prstGeom>
-          <a:noFill/>
-        </p:spPr>
-        <p:txBody>
-          <a:bodyPr wrap="square">
-            <a:spAutoFit/>
-          </a:bodyPr>
-          <a:lstStyle/>
-          <a:p>
-            <a:pPr algn="ctr"/>
-            <a:r>
-              <a:rPr sz="4400" b="1" i="0">
-                <a:solidFill>
-                  <a:srgbClr val="FFFFFF"/>
-                </a:solidFill>
-                <a:latin typeface="Arial"/>
-              </a:rPr>
-              <a:t>A riqueza do Teu amor</a:t>
-            </a:r>
-          </a:p>
-        </p:txBody>
-      </p:sp>
-      <p:sp>
-        <p:nvSpPr>
           <p:cNvPr id="5" name="TextBox 4"/>
           <p:cNvSpPr txBox="1"/>
           <p:nvPr/>
         </p:nvSpPr>
         <p:spPr>
           <a:xfrm>
-            <a:off x="594360" y="4251960"/>
-            <a:ext cx="11002975" cy="347472"/>
-          </a:xfrm>
-          <a:prstGeom prst="rect">
-            <a:avLst/>
-          </a:prstGeom>
-          <a:noFill/>
-        </p:spPr>
-        <p:txBody>
-          <a:bodyPr wrap="square">
-            <a:spAutoFit/>
-          </a:bodyPr>
-          <a:lstStyle/>
-          <a:p>
-            <a:pPr algn="ctr"/>
-            <a:r>
-              <a:rPr sz="2200" b="0" i="1">
-                <a:solidFill>
-                  <a:srgbClr val="8C8C8C"/>
+            <a:off x="640080" y="4494276"/>
+            <a:ext cx="10911535" cy="310896"/>
+          </a:xfrm>
+          <a:prstGeom prst="rect">
+            <a:avLst/>
+          </a:prstGeom>
+          <a:noFill/>
+        </p:spPr>
+        <p:txBody>
+          <a:bodyPr wrap="square">
+            <a:spAutoFit/>
+          </a:bodyPr>
+          <a:lstStyle/>
+          <a:p>
+            <a:pPr algn="ctr"/>
+            <a:r>
+              <a:rPr sz="2000" b="0" i="0">
+                <a:solidFill>
+                  <a:srgbClr val="828282"/>
                 </a:solidFill>
                 <a:latin typeface="Arial"/>
               </a:rPr>
@@ -3725,23 +3620,23 @@
         </p:nvSpPr>
         <p:spPr>
           <a:xfrm>
-            <a:off x="594360" y="2258568"/>
-            <a:ext cx="11002975" cy="685800"/>
-          </a:xfrm>
-          <a:prstGeom prst="rect">
-            <a:avLst/>
-          </a:prstGeom>
-          <a:noFill/>
-        </p:spPr>
-        <p:txBody>
-          <a:bodyPr wrap="square">
-            <a:spAutoFit/>
-          </a:bodyPr>
-          <a:lstStyle/>
-          <a:p>
-            <a:pPr algn="ctr"/>
-            <a:r>
-              <a:rPr sz="4400" b="1" i="0">
+            <a:off x="640080" y="2052828"/>
+            <a:ext cx="10911535" cy="731520"/>
+          </a:xfrm>
+          <a:prstGeom prst="rect">
+            <a:avLst/>
+          </a:prstGeom>
+          <a:noFill/>
+        </p:spPr>
+        <p:txBody>
+          <a:bodyPr wrap="square">
+            <a:spAutoFit/>
+          </a:bodyPr>
+          <a:lstStyle/>
+          <a:p>
+            <a:pPr algn="ctr"/>
+            <a:r>
+              <a:rPr sz="4800" b="1" i="0">
                 <a:solidFill>
                   <a:srgbClr val="FFFFFF"/>
                 </a:solidFill>
@@ -3760,25 +3655,60 @@
         </p:nvSpPr>
         <p:spPr>
           <a:xfrm>
-            <a:off x="594360" y="2980944"/>
-            <a:ext cx="11002975" cy="347472"/>
-          </a:xfrm>
-          <a:prstGeom prst="rect">
-            <a:avLst/>
-          </a:prstGeom>
-          <a:noFill/>
-        </p:spPr>
-        <p:txBody>
-          <a:bodyPr wrap="square">
-            <a:spAutoFit/>
-          </a:bodyPr>
-          <a:lstStyle/>
-          <a:p>
-            <a:pPr algn="ctr"/>
-            <a:r>
-              <a:rPr sz="2200" b="0" i="1">
-                <a:solidFill>
-                  <a:srgbClr val="8C8C8C"/>
+            <a:off x="640080" y="2985516"/>
+            <a:ext cx="10911535" cy="731520"/>
+          </a:xfrm>
+          <a:prstGeom prst="rect">
+            <a:avLst/>
+          </a:prstGeom>
+          <a:noFill/>
+        </p:spPr>
+        <p:txBody>
+          <a:bodyPr wrap="square">
+            <a:spAutoFit/>
+          </a:bodyPr>
+          <a:lstStyle/>
+          <a:p>
+            <a:pPr algn="ctr"/>
+            <a:r>
+              <a:rPr sz="4800" b="1" i="0">
+                <a:solidFill>
+                  <a:srgbClr val="FFFFFF"/>
+                </a:solidFill>
+                <a:latin typeface="Arial"/>
+              </a:rPr>
+              <a:t>Nada se compara ao Teu abraço</a:t>
+            </a:r>
+          </a:p>
+        </p:txBody>
+      </p:sp>
+      <p:sp>
+        <p:nvSpPr>
+          <p:cNvPr id="4" name="TextBox 3"/>
+          <p:cNvSpPr txBox="1"/>
+          <p:nvPr/>
+        </p:nvSpPr>
+        <p:spPr>
+          <a:xfrm>
+            <a:off x="640080" y="4128516"/>
+            <a:ext cx="10911535" cy="310896"/>
+          </a:xfrm>
+          <a:prstGeom prst="rect">
+            <a:avLst/>
+          </a:prstGeom>
+          <a:noFill/>
+        </p:spPr>
+        <p:txBody>
+          <a:bodyPr wrap="square">
+            <a:spAutoFit/>
+          </a:bodyPr>
+          <a:lstStyle/>
+          <a:p>
+            <a:pPr algn="ctr"/>
+            <a:r>
+              <a:rPr sz="2000" b="0" i="0">
+                <a:solidFill>
+                  <a:srgbClr val="828282"/>
                 </a:solidFill>
                 <a:latin typeface="Arial"/>
               </a:rPr>
@@ -3789,66 +3719,31 @@
       </p:sp>
       <p:sp>
         <p:nvSpPr>
-          <p:cNvPr id="4" name="TextBox 3"/>
-          <p:cNvSpPr txBox="1"/>
-          <p:nvPr/>
-        </p:nvSpPr>
-        <p:spPr>
-          <a:xfrm>
-            <a:off x="594360" y="3529584"/>
-            <a:ext cx="11002975" cy="685800"/>
-          </a:xfrm>
-          <a:prstGeom prst="rect">
-            <a:avLst/>
-          </a:prstGeom>
-          <a:noFill/>
-        </p:spPr>
-        <p:txBody>
-          <a:bodyPr wrap="square">
-            <a:spAutoFit/>
-          </a:bodyPr>
-          <a:lstStyle/>
-          <a:p>
-            <a:pPr algn="ctr"/>
-            <a:r>
-              <a:rPr sz="4400" b="1" i="0">
-                <a:solidFill>
-                  <a:srgbClr val="FFFFFF"/>
-                </a:solidFill>
-                <a:latin typeface="Arial"/>
-              </a:rPr>
-              <a:t>Nada se compara ao Teu abraço</a:t>
-            </a:r>
-          </a:p>
-        </p:txBody>
-      </p:sp>
-      <p:sp>
-        <p:nvSpPr>
           <p:cNvPr id="5" name="TextBox 4"/>
           <p:cNvSpPr txBox="1"/>
           <p:nvPr/>
         </p:nvSpPr>
         <p:spPr>
           <a:xfrm>
-            <a:off x="594360" y="4251960"/>
-            <a:ext cx="11002975" cy="347472"/>
-          </a:xfrm>
-          <a:prstGeom prst="rect">
-            <a:avLst/>
-          </a:prstGeom>
-          <a:noFill/>
-        </p:spPr>
-        <p:txBody>
-          <a:bodyPr wrap="square">
-            <a:spAutoFit/>
-          </a:bodyPr>
-          <a:lstStyle/>
-          <a:p>
-            <a:pPr algn="ctr"/>
-            <a:r>
-              <a:rPr sz="2200" b="0" i="1">
-                <a:solidFill>
-                  <a:srgbClr val="8C8C8C"/>
+            <a:off x="640080" y="4494276"/>
+            <a:ext cx="10911535" cy="310896"/>
+          </a:xfrm>
+          <a:prstGeom prst="rect">
+            <a:avLst/>
+          </a:prstGeom>
+          <a:noFill/>
+        </p:spPr>
+        <p:txBody>
+          <a:bodyPr wrap="square">
+            <a:spAutoFit/>
+          </a:bodyPr>
+          <a:lstStyle/>
+          <a:p>
+            <a:pPr algn="ctr"/>
+            <a:r>
+              <a:rPr sz="2000" b="0" i="0">
+                <a:solidFill>
+                  <a:srgbClr val="828282"/>
                 </a:solidFill>
                 <a:latin typeface="Arial"/>
               </a:rPr>
@@ -3891,23 +3786,23 @@
         </p:nvSpPr>
         <p:spPr>
           <a:xfrm>
-            <a:off x="594360" y="2258568"/>
-            <a:ext cx="11002975" cy="685800"/>
-          </a:xfrm>
-          <a:prstGeom prst="rect">
-            <a:avLst/>
-          </a:prstGeom>
-          <a:noFill/>
-        </p:spPr>
-        <p:txBody>
-          <a:bodyPr wrap="square">
-            <a:spAutoFit/>
-          </a:bodyPr>
-          <a:lstStyle/>
-          <a:p>
-            <a:pPr algn="ctr"/>
-            <a:r>
-              <a:rPr sz="4400" b="1" i="0">
+            <a:off x="640080" y="2052828"/>
+            <a:ext cx="10911535" cy="731520"/>
+          </a:xfrm>
+          <a:prstGeom prst="rect">
+            <a:avLst/>
+          </a:prstGeom>
+          <a:noFill/>
+        </p:spPr>
+        <p:txBody>
+          <a:bodyPr wrap="square">
+            <a:spAutoFit/>
+          </a:bodyPr>
+          <a:lstStyle/>
+          <a:p>
+            <a:pPr algn="ctr"/>
+            <a:r>
+              <a:rPr sz="4800" b="1" i="0">
                 <a:solidFill>
                   <a:srgbClr val="FFFFFF"/>
                 </a:solidFill>
@@ -3926,99 +3821,29 @@
         </p:nvSpPr>
         <p:spPr>
           <a:xfrm>
-            <a:off x="594360" y="2980944"/>
-            <a:ext cx="11002975" cy="347472"/>
-          </a:xfrm>
-          <a:prstGeom prst="rect">
-            <a:avLst/>
-          </a:prstGeom>
-          <a:noFill/>
-        </p:spPr>
-        <p:txBody>
-          <a:bodyPr wrap="square">
-            <a:spAutoFit/>
-          </a:bodyPr>
-          <a:lstStyle/>
-          <a:p>
-            <a:pPr algn="ctr"/>
-            <a:r>
-              <a:rPr sz="2200" b="0" i="1">
-                <a:solidFill>
-                  <a:srgbClr val="8C8C8C"/>
-                </a:solidFill>
-                <a:latin typeface="Arial"/>
-              </a:rPr>
-              <a:t/>
-            </a:r>
-          </a:p>
-        </p:txBody>
-      </p:sp>
-      <p:sp>
-        <p:nvSpPr>
-          <p:cNvPr id="4" name="TextBox 3"/>
-          <p:cNvSpPr txBox="1"/>
-          <p:nvPr/>
-        </p:nvSpPr>
-        <p:spPr>
-          <a:xfrm>
-            <a:off x="594360" y="3529584"/>
-            <a:ext cx="11002975" cy="685800"/>
-          </a:xfrm>
-          <a:prstGeom prst="rect">
-            <a:avLst/>
-          </a:prstGeom>
-          <a:noFill/>
-        </p:spPr>
-        <p:txBody>
-          <a:bodyPr wrap="square">
-            <a:spAutoFit/>
-          </a:bodyPr>
-          <a:lstStyle/>
-          <a:p>
-            <a:pPr algn="ctr"/>
-            <a:r>
-              <a:rPr sz="4141" b="1" i="0">
+            <a:off x="640080" y="2985516"/>
+            <a:ext cx="10911535" cy="731520"/>
+          </a:xfrm>
+          <a:prstGeom prst="rect">
+            <a:avLst/>
+          </a:prstGeom>
+          <a:noFill/>
+        </p:spPr>
+        <p:txBody>
+          <a:bodyPr wrap="square">
+            <a:spAutoFit/>
+          </a:bodyPr>
+          <a:lstStyle/>
+          <a:p>
+            <a:pPr algn="ctr"/>
+            <a:r>
+              <a:rPr sz="4500" b="1" i="0">
                 <a:solidFill>
                   <a:srgbClr val="FFFFFF"/>
                 </a:solidFill>
                 <a:latin typeface="Arial"/>
               </a:rPr>
               <a:t>Estou correndo para os Teus braços</a:t>
-            </a:r>
-          </a:p>
-        </p:txBody>
-      </p:sp>
-      <p:sp>
-        <p:nvSpPr>
-          <p:cNvPr id="5" name="TextBox 4"/>
-          <p:cNvSpPr txBox="1"/>
-          <p:nvPr/>
-        </p:nvSpPr>
-        <p:spPr>
-          <a:xfrm>
-            <a:off x="594360" y="4251960"/>
-            <a:ext cx="11002975" cy="347472"/>
-          </a:xfrm>
-          <a:prstGeom prst="rect">
-            <a:avLst/>
-          </a:prstGeom>
-          <a:noFill/>
-        </p:spPr>
-        <p:txBody>
-          <a:bodyPr wrap="square">
-            <a:spAutoFit/>
-          </a:bodyPr>
-          <a:lstStyle/>
-          <a:p>
-            <a:pPr algn="ctr"/>
-            <a:r>
-              <a:rPr sz="2200" b="0" i="1">
-                <a:solidFill>
-                  <a:srgbClr val="8C8C8C"/>
-                </a:solidFill>
-                <a:latin typeface="Arial"/>
-              </a:rPr>
-              <a:t/>
             </a:r>
           </a:p>
         </p:txBody>
@@ -4057,23 +3882,23 @@
         </p:nvSpPr>
         <p:spPr>
           <a:xfrm>
-            <a:off x="594360" y="2258568"/>
-            <a:ext cx="11002975" cy="685800"/>
-          </a:xfrm>
-          <a:prstGeom prst="rect">
-            <a:avLst/>
-          </a:prstGeom>
-          <a:noFill/>
-        </p:spPr>
-        <p:txBody>
-          <a:bodyPr wrap="square">
-            <a:spAutoFit/>
-          </a:bodyPr>
-          <a:lstStyle/>
-          <a:p>
-            <a:pPr algn="ctr"/>
-            <a:r>
-              <a:rPr sz="4141" b="1" i="0">
+            <a:off x="640080" y="2052828"/>
+            <a:ext cx="10911535" cy="731520"/>
+          </a:xfrm>
+          <a:prstGeom prst="rect">
+            <a:avLst/>
+          </a:prstGeom>
+          <a:noFill/>
+        </p:spPr>
+        <p:txBody>
+          <a:bodyPr wrap="square">
+            <a:spAutoFit/>
+          </a:bodyPr>
+          <a:lstStyle/>
+          <a:p>
+            <a:pPr algn="ctr"/>
+            <a:r>
+              <a:rPr sz="4500" b="1" i="0">
                 <a:solidFill>
                   <a:srgbClr val="FFFFFF"/>
                 </a:solidFill>
@@ -4092,99 +3917,29 @@
         </p:nvSpPr>
         <p:spPr>
           <a:xfrm>
-            <a:off x="594360" y="2980944"/>
-            <a:ext cx="11002975" cy="347472"/>
-          </a:xfrm>
-          <a:prstGeom prst="rect">
-            <a:avLst/>
-          </a:prstGeom>
-          <a:noFill/>
-        </p:spPr>
-        <p:txBody>
-          <a:bodyPr wrap="square">
-            <a:spAutoFit/>
-          </a:bodyPr>
-          <a:lstStyle/>
-          <a:p>
-            <a:pPr algn="ctr"/>
-            <a:r>
-              <a:rPr sz="2200" b="0" i="1">
-                <a:solidFill>
-                  <a:srgbClr val="8C8C8C"/>
-                </a:solidFill>
-                <a:latin typeface="Arial"/>
-              </a:rPr>
-              <a:t/>
-            </a:r>
-          </a:p>
-        </p:txBody>
-      </p:sp>
-      <p:sp>
-        <p:nvSpPr>
-          <p:cNvPr id="4" name="TextBox 3"/>
-          <p:cNvSpPr txBox="1"/>
-          <p:nvPr/>
-        </p:nvSpPr>
-        <p:spPr>
-          <a:xfrm>
-            <a:off x="594360" y="3529584"/>
-            <a:ext cx="11002975" cy="685800"/>
-          </a:xfrm>
-          <a:prstGeom prst="rect">
-            <a:avLst/>
-          </a:prstGeom>
-          <a:noFill/>
-        </p:spPr>
-        <p:txBody>
-          <a:bodyPr wrap="square">
-            <a:spAutoFit/>
-          </a:bodyPr>
-          <a:lstStyle/>
-          <a:p>
-            <a:pPr algn="ctr"/>
-            <a:r>
-              <a:rPr sz="4400" b="1" i="0">
+            <a:off x="640080" y="2985516"/>
+            <a:ext cx="10911535" cy="731520"/>
+          </a:xfrm>
+          <a:prstGeom prst="rect">
+            <a:avLst/>
+          </a:prstGeom>
+          <a:noFill/>
+        </p:spPr>
+        <p:txBody>
+          <a:bodyPr wrap="square">
+            <a:spAutoFit/>
+          </a:bodyPr>
+          <a:lstStyle/>
+          <a:p>
+            <a:pPr algn="ctr"/>
+            <a:r>
+              <a:rPr sz="4800" b="1" i="0">
                 <a:solidFill>
                   <a:srgbClr val="FFFFFF"/>
                 </a:solidFill>
                 <a:latin typeface="Arial"/>
               </a:rPr>
               <a:t>A riqueza do Teu amor</a:t>
-            </a:r>
-          </a:p>
-        </p:txBody>
-      </p:sp>
-      <p:sp>
-        <p:nvSpPr>
-          <p:cNvPr id="5" name="TextBox 4"/>
-          <p:cNvSpPr txBox="1"/>
-          <p:nvPr/>
-        </p:nvSpPr>
-        <p:spPr>
-          <a:xfrm>
-            <a:off x="594360" y="4251960"/>
-            <a:ext cx="11002975" cy="347472"/>
-          </a:xfrm>
-          <a:prstGeom prst="rect">
-            <a:avLst/>
-          </a:prstGeom>
-          <a:noFill/>
-        </p:spPr>
-        <p:txBody>
-          <a:bodyPr wrap="square">
-            <a:spAutoFit/>
-          </a:bodyPr>
-          <a:lstStyle/>
-          <a:p>
-            <a:pPr algn="ctr"/>
-            <a:r>
-              <a:rPr sz="2200" b="0" i="1">
-                <a:solidFill>
-                  <a:srgbClr val="8C8C8C"/>
-                </a:solidFill>
-                <a:latin typeface="Arial"/>
-              </a:rPr>
-              <a:t/>
             </a:r>
           </a:p>
         </p:txBody>
@@ -4223,23 +3978,23 @@
         </p:nvSpPr>
         <p:spPr>
           <a:xfrm>
-            <a:off x="594360" y="2258568"/>
-            <a:ext cx="11002975" cy="685800"/>
-          </a:xfrm>
-          <a:prstGeom prst="rect">
-            <a:avLst/>
-          </a:prstGeom>
-          <a:noFill/>
-        </p:spPr>
-        <p:txBody>
-          <a:bodyPr wrap="square">
-            <a:spAutoFit/>
-          </a:bodyPr>
-          <a:lstStyle/>
-          <a:p>
-            <a:pPr algn="ctr"/>
-            <a:r>
-              <a:rPr sz="4400" b="1" i="0">
+            <a:off x="640080" y="2052828"/>
+            <a:ext cx="10911535" cy="731520"/>
+          </a:xfrm>
+          <a:prstGeom prst="rect">
+            <a:avLst/>
+          </a:prstGeom>
+          <a:noFill/>
+        </p:spPr>
+        <p:txBody>
+          <a:bodyPr wrap="square">
+            <a:spAutoFit/>
+          </a:bodyPr>
+          <a:lstStyle/>
+          <a:p>
+            <a:pPr algn="ctr"/>
+            <a:r>
+              <a:rPr sz="4800" b="1" i="0">
                 <a:solidFill>
                   <a:srgbClr val="FFFFFF"/>
                 </a:solidFill>
@@ -4258,99 +4013,29 @@
         </p:nvSpPr>
         <p:spPr>
           <a:xfrm>
-            <a:off x="594360" y="2980944"/>
-            <a:ext cx="11002975" cy="347472"/>
-          </a:xfrm>
-          <a:prstGeom prst="rect">
-            <a:avLst/>
-          </a:prstGeom>
-          <a:noFill/>
-        </p:spPr>
-        <p:txBody>
-          <a:bodyPr wrap="square">
-            <a:spAutoFit/>
-          </a:bodyPr>
-          <a:lstStyle/>
-          <a:p>
-            <a:pPr algn="ctr"/>
-            <a:r>
-              <a:rPr sz="2200" b="0" i="1">
-                <a:solidFill>
-                  <a:srgbClr val="8C8C8C"/>
-                </a:solidFill>
-                <a:latin typeface="Arial"/>
-              </a:rPr>
-              <a:t/>
-            </a:r>
-          </a:p>
-        </p:txBody>
-      </p:sp>
-      <p:sp>
-        <p:nvSpPr>
-          <p:cNvPr id="4" name="TextBox 3"/>
-          <p:cNvSpPr txBox="1"/>
-          <p:nvPr/>
-        </p:nvSpPr>
-        <p:spPr>
-          <a:xfrm>
-            <a:off x="594360" y="3529584"/>
-            <a:ext cx="11002975" cy="685800"/>
-          </a:xfrm>
-          <a:prstGeom prst="rect">
-            <a:avLst/>
-          </a:prstGeom>
-          <a:noFill/>
-        </p:spPr>
-        <p:txBody>
-          <a:bodyPr wrap="square">
-            <a:spAutoFit/>
-          </a:bodyPr>
-          <a:lstStyle/>
-          <a:p>
-            <a:pPr algn="ctr"/>
-            <a:r>
-              <a:rPr sz="4400" b="1" i="0">
+            <a:off x="640080" y="2985516"/>
+            <a:ext cx="10911535" cy="731520"/>
+          </a:xfrm>
+          <a:prstGeom prst="rect">
+            <a:avLst/>
+          </a:prstGeom>
+          <a:noFill/>
+        </p:spPr>
+        <p:txBody>
+          <a:bodyPr wrap="square">
+            <a:spAutoFit/>
+          </a:bodyPr>
+          <a:lstStyle/>
+          <a:p>
+            <a:pPr algn="ctr"/>
+            <a:r>
+              <a:rPr sz="4800" b="1" i="0">
                 <a:solidFill>
                   <a:srgbClr val="FFFFFF"/>
                 </a:solidFill>
                 <a:latin typeface="Arial"/>
               </a:rPr>
               <a:t>Nada se compara ao Teu abraço</a:t>
-            </a:r>
-          </a:p>
-        </p:txBody>
-      </p:sp>
-      <p:sp>
-        <p:nvSpPr>
-          <p:cNvPr id="5" name="TextBox 4"/>
-          <p:cNvSpPr txBox="1"/>
-          <p:nvPr/>
-        </p:nvSpPr>
-        <p:spPr>
-          <a:xfrm>
-            <a:off x="594360" y="4251960"/>
-            <a:ext cx="11002975" cy="347472"/>
-          </a:xfrm>
-          <a:prstGeom prst="rect">
-            <a:avLst/>
-          </a:prstGeom>
-          <a:noFill/>
-        </p:spPr>
-        <p:txBody>
-          <a:bodyPr wrap="square">
-            <a:spAutoFit/>
-          </a:bodyPr>
-          <a:lstStyle/>
-          <a:p>
-            <a:pPr algn="ctr"/>
-            <a:r>
-              <a:rPr sz="2200" b="0" i="1">
-                <a:solidFill>
-                  <a:srgbClr val="8C8C8C"/>
-                </a:solidFill>
-                <a:latin typeface="Arial"/>
-              </a:rPr>
-              <a:t/>
             </a:r>
           </a:p>
         </p:txBody>
@@ -4389,23 +4074,23 @@
         </p:nvSpPr>
         <p:spPr>
           <a:xfrm>
-            <a:off x="594360" y="2258568"/>
-            <a:ext cx="11002975" cy="685800"/>
-          </a:xfrm>
-          <a:prstGeom prst="rect">
-            <a:avLst/>
-          </a:prstGeom>
-          <a:noFill/>
-        </p:spPr>
-        <p:txBody>
-          <a:bodyPr wrap="square">
-            <a:spAutoFit/>
-          </a:bodyPr>
-          <a:lstStyle/>
-          <a:p>
-            <a:pPr algn="ctr"/>
-            <a:r>
-              <a:rPr sz="4022" b="1" i="0">
+            <a:off x="640080" y="2052828"/>
+            <a:ext cx="10911535" cy="731520"/>
+          </a:xfrm>
+          <a:prstGeom prst="rect">
+            <a:avLst/>
+          </a:prstGeom>
+          <a:noFill/>
+        </p:spPr>
+        <p:txBody>
+          <a:bodyPr wrap="square">
+            <a:spAutoFit/>
+          </a:bodyPr>
+          <a:lstStyle/>
+          <a:p>
+            <a:pPr algn="ctr"/>
+            <a:r>
+              <a:rPr sz="4300" b="1" i="0">
                 <a:solidFill>
                   <a:srgbClr val="FFFFFF"/>
                 </a:solidFill>
@@ -4424,99 +4109,29 @@
         </p:nvSpPr>
         <p:spPr>
           <a:xfrm>
-            <a:off x="594360" y="2980944"/>
-            <a:ext cx="11002975" cy="347472"/>
-          </a:xfrm>
-          <a:prstGeom prst="rect">
-            <a:avLst/>
-          </a:prstGeom>
-          <a:noFill/>
-        </p:spPr>
-        <p:txBody>
-          <a:bodyPr wrap="square">
-            <a:spAutoFit/>
-          </a:bodyPr>
-          <a:lstStyle/>
-          <a:p>
-            <a:pPr algn="ctr"/>
-            <a:r>
-              <a:rPr sz="2200" b="0" i="1">
-                <a:solidFill>
-                  <a:srgbClr val="8C8C8C"/>
-                </a:solidFill>
-                <a:latin typeface="Arial"/>
-              </a:rPr>
-              <a:t/>
-            </a:r>
-          </a:p>
-        </p:txBody>
-      </p:sp>
-      <p:sp>
-        <p:nvSpPr>
-          <p:cNvPr id="4" name="TextBox 3"/>
-          <p:cNvSpPr txBox="1"/>
-          <p:nvPr/>
-        </p:nvSpPr>
-        <p:spPr>
-          <a:xfrm>
-            <a:off x="594360" y="3529584"/>
-            <a:ext cx="11002975" cy="685800"/>
-          </a:xfrm>
-          <a:prstGeom prst="rect">
-            <a:avLst/>
-          </a:prstGeom>
-          <a:noFill/>
-        </p:spPr>
-        <p:txBody>
-          <a:bodyPr wrap="square">
-            <a:spAutoFit/>
-          </a:bodyPr>
-          <a:lstStyle/>
-          <a:p>
-            <a:pPr algn="ctr"/>
-            <a:r>
-              <a:rPr sz="4400" b="1" i="0">
+            <a:off x="640080" y="2985516"/>
+            <a:ext cx="10911535" cy="731520"/>
+          </a:xfrm>
+          <a:prstGeom prst="rect">
+            <a:avLst/>
+          </a:prstGeom>
+          <a:noFill/>
+        </p:spPr>
+        <p:txBody>
+          <a:bodyPr wrap="square">
+            <a:spAutoFit/>
+          </a:bodyPr>
+          <a:lstStyle/>
+          <a:p>
+            <a:pPr algn="ctr"/>
+            <a:r>
+              <a:rPr sz="4800" b="1" i="0">
                 <a:solidFill>
                   <a:srgbClr val="FFFFFF"/>
                 </a:solidFill>
                 <a:latin typeface="Arial"/>
               </a:rPr>
               <a:t>Tu és Senhor, Tu és Senhor</a:t>
-            </a:r>
-          </a:p>
-        </p:txBody>
-      </p:sp>
-      <p:sp>
-        <p:nvSpPr>
-          <p:cNvPr id="5" name="TextBox 4"/>
-          <p:cNvSpPr txBox="1"/>
-          <p:nvPr/>
-        </p:nvSpPr>
-        <p:spPr>
-          <a:xfrm>
-            <a:off x="594360" y="4251960"/>
-            <a:ext cx="11002975" cy="347472"/>
-          </a:xfrm>
-          <a:prstGeom prst="rect">
-            <a:avLst/>
-          </a:prstGeom>
-          <a:noFill/>
-        </p:spPr>
-        <p:txBody>
-          <a:bodyPr wrap="square">
-            <a:spAutoFit/>
-          </a:bodyPr>
-          <a:lstStyle/>
-          <a:p>
-            <a:pPr algn="ctr"/>
-            <a:r>
-              <a:rPr sz="2200" b="0" i="1">
-                <a:solidFill>
-                  <a:srgbClr val="8C8C8C"/>
-                </a:solidFill>
-                <a:latin typeface="Arial"/>
-              </a:rPr>
-              <a:t/>
             </a:r>
           </a:p>
         </p:txBody>
@@ -4555,23 +4170,23 @@
         </p:nvSpPr>
         <p:spPr>
           <a:xfrm>
-            <a:off x="594360" y="2258568"/>
-            <a:ext cx="11002975" cy="685800"/>
-          </a:xfrm>
-          <a:prstGeom prst="rect">
-            <a:avLst/>
-          </a:prstGeom>
-          <a:noFill/>
-        </p:spPr>
-        <p:txBody>
-          <a:bodyPr wrap="square">
-            <a:spAutoFit/>
-          </a:bodyPr>
-          <a:lstStyle/>
-          <a:p>
-            <a:pPr algn="ctr"/>
-            <a:r>
-              <a:rPr sz="4400" b="1" i="0">
+            <a:off x="640080" y="2052828"/>
+            <a:ext cx="10911535" cy="731520"/>
+          </a:xfrm>
+          <a:prstGeom prst="rect">
+            <a:avLst/>
+          </a:prstGeom>
+          <a:noFill/>
+        </p:spPr>
+        <p:txBody>
+          <a:bodyPr wrap="square">
+            <a:spAutoFit/>
+          </a:bodyPr>
+          <a:lstStyle/>
+          <a:p>
+            <a:pPr algn="ctr"/>
+            <a:r>
+              <a:rPr sz="4800" b="1" i="0">
                 <a:solidFill>
                   <a:srgbClr val="FFFFFF"/>
                 </a:solidFill>
@@ -4590,99 +4205,29 @@
         </p:nvSpPr>
         <p:spPr>
           <a:xfrm>
-            <a:off x="594360" y="2980944"/>
-            <a:ext cx="11002975" cy="347472"/>
-          </a:xfrm>
-          <a:prstGeom prst="rect">
-            <a:avLst/>
-          </a:prstGeom>
-          <a:noFill/>
-        </p:spPr>
-        <p:txBody>
-          <a:bodyPr wrap="square">
-            <a:spAutoFit/>
-          </a:bodyPr>
-          <a:lstStyle/>
-          <a:p>
-            <a:pPr algn="ctr"/>
-            <a:r>
-              <a:rPr sz="2200" b="0" i="1">
-                <a:solidFill>
-                  <a:srgbClr val="8C8C8C"/>
-                </a:solidFill>
-                <a:latin typeface="Arial"/>
-              </a:rPr>
-              <a:t/>
-            </a:r>
-          </a:p>
-        </p:txBody>
-      </p:sp>
-      <p:sp>
-        <p:nvSpPr>
-          <p:cNvPr id="4" name="TextBox 3"/>
-          <p:cNvSpPr txBox="1"/>
-          <p:nvPr/>
-        </p:nvSpPr>
-        <p:spPr>
-          <a:xfrm>
-            <a:off x="594360" y="3529584"/>
-            <a:ext cx="11002975" cy="685800"/>
-          </a:xfrm>
-          <a:prstGeom prst="rect">
-            <a:avLst/>
-          </a:prstGeom>
-          <a:noFill/>
-        </p:spPr>
-        <p:txBody>
-          <a:bodyPr wrap="square">
-            <a:spAutoFit/>
-          </a:bodyPr>
-          <a:lstStyle/>
-          <a:p>
-            <a:pPr algn="ctr"/>
-            <a:r>
-              <a:rPr sz="4400" b="1" i="0">
+            <a:off x="640080" y="2985516"/>
+            <a:ext cx="10911535" cy="731520"/>
+          </a:xfrm>
+          <a:prstGeom prst="rect">
+            <a:avLst/>
+          </a:prstGeom>
+          <a:noFill/>
+        </p:spPr>
+        <p:txBody>
+          <a:bodyPr wrap="square">
+            <a:spAutoFit/>
+          </a:bodyPr>
+          <a:lstStyle/>
+          <a:p>
+            <a:pPr algn="ctr"/>
+            <a:r>
+              <a:rPr sz="4800" b="1" i="0">
                 <a:solidFill>
                   <a:srgbClr val="FFFFFF"/>
                 </a:solidFill>
                 <a:latin typeface="Arial"/>
               </a:rPr>
               <a:t>Tu estás aqui, Tu estás aqui</a:t>
-            </a:r>
-          </a:p>
-        </p:txBody>
-      </p:sp>
-      <p:sp>
-        <p:nvSpPr>
-          <p:cNvPr id="5" name="TextBox 4"/>
-          <p:cNvSpPr txBox="1"/>
-          <p:nvPr/>
-        </p:nvSpPr>
-        <p:spPr>
-          <a:xfrm>
-            <a:off x="594360" y="4251960"/>
-            <a:ext cx="11002975" cy="347472"/>
-          </a:xfrm>
-          <a:prstGeom prst="rect">
-            <a:avLst/>
-          </a:prstGeom>
-          <a:noFill/>
-        </p:spPr>
-        <p:txBody>
-          <a:bodyPr wrap="square">
-            <a:spAutoFit/>
-          </a:bodyPr>
-          <a:lstStyle/>
-          <a:p>
-            <a:pPr algn="ctr"/>
-            <a:r>
-              <a:rPr sz="2200" b="0" i="1">
-                <a:solidFill>
-                  <a:srgbClr val="8C8C8C"/>
-                </a:solidFill>
-                <a:latin typeface="Arial"/>
-              </a:rPr>
-              <a:t/>
             </a:r>
           </a:p>
         </p:txBody>
@@ -4721,23 +4266,23 @@
         </p:nvSpPr>
         <p:spPr>
           <a:xfrm>
-            <a:off x="594360" y="2258568"/>
-            <a:ext cx="11002975" cy="685800"/>
-          </a:xfrm>
-          <a:prstGeom prst="rect">
-            <a:avLst/>
-          </a:prstGeom>
-          <a:noFill/>
-        </p:spPr>
-        <p:txBody>
-          <a:bodyPr wrap="square">
-            <a:spAutoFit/>
-          </a:bodyPr>
-          <a:lstStyle/>
-          <a:p>
-            <a:pPr algn="ctr"/>
-            <a:r>
-              <a:rPr sz="4400" b="1" i="0">
+            <a:off x="640080" y="2052828"/>
+            <a:ext cx="10911535" cy="731520"/>
+          </a:xfrm>
+          <a:prstGeom prst="rect">
+            <a:avLst/>
+          </a:prstGeom>
+          <a:noFill/>
+        </p:spPr>
+        <p:txBody>
+          <a:bodyPr wrap="square">
+            <a:spAutoFit/>
+          </a:bodyPr>
+          <a:lstStyle/>
+          <a:p>
+            <a:pPr algn="ctr"/>
+            <a:r>
+              <a:rPr sz="4800" b="1" i="0">
                 <a:solidFill>
                   <a:srgbClr val="FFFFFF"/>
                 </a:solidFill>
@@ -4756,99 +4301,29 @@
         </p:nvSpPr>
         <p:spPr>
           <a:xfrm>
-            <a:off x="594360" y="2980944"/>
-            <a:ext cx="11002975" cy="347472"/>
-          </a:xfrm>
-          <a:prstGeom prst="rect">
-            <a:avLst/>
-          </a:prstGeom>
-          <a:noFill/>
-        </p:spPr>
-        <p:txBody>
-          <a:bodyPr wrap="square">
-            <a:spAutoFit/>
-          </a:bodyPr>
-          <a:lstStyle/>
-          <a:p>
-            <a:pPr algn="ctr"/>
-            <a:r>
-              <a:rPr sz="2200" b="0" i="1">
-                <a:solidFill>
-                  <a:srgbClr val="8C8C8C"/>
-                </a:solidFill>
-                <a:latin typeface="Arial"/>
-              </a:rPr>
-              <a:t/>
-            </a:r>
-          </a:p>
-        </p:txBody>
-      </p:sp>
-      <p:sp>
-        <p:nvSpPr>
-          <p:cNvPr id="4" name="TextBox 3"/>
-          <p:cNvSpPr txBox="1"/>
-          <p:nvPr/>
-        </p:nvSpPr>
-        <p:spPr>
-          <a:xfrm>
-            <a:off x="594360" y="3529584"/>
-            <a:ext cx="11002975" cy="685800"/>
-          </a:xfrm>
-          <a:prstGeom prst="rect">
-            <a:avLst/>
-          </a:prstGeom>
-          <a:noFill/>
-        </p:spPr>
-        <p:txBody>
-          <a:bodyPr wrap="square">
-            <a:spAutoFit/>
-          </a:bodyPr>
-          <a:lstStyle/>
-          <a:p>
-            <a:pPr algn="ctr"/>
-            <a:r>
-              <a:rPr sz="4400" b="1" i="0">
+            <a:off x="640080" y="2985516"/>
+            <a:ext cx="10911535" cy="731520"/>
+          </a:xfrm>
+          <a:prstGeom prst="rect">
+            <a:avLst/>
+          </a:prstGeom>
+          <a:noFill/>
+        </p:spPr>
+        <p:txBody>
+          <a:bodyPr wrap="square">
+            <a:spAutoFit/>
+          </a:bodyPr>
+          <a:lstStyle/>
+          <a:p>
+            <a:pPr algn="ctr"/>
+            <a:r>
+              <a:rPr sz="4800" b="1" i="0">
                 <a:solidFill>
                   <a:srgbClr val="FFFFFF"/>
                 </a:solidFill>
                 <a:latin typeface="Arial"/>
               </a:rPr>
               <a:t>Tu és Deus, Tu és Deus</a:t>
-            </a:r>
-          </a:p>
-        </p:txBody>
-      </p:sp>
-      <p:sp>
-        <p:nvSpPr>
-          <p:cNvPr id="5" name="TextBox 4"/>
-          <p:cNvSpPr txBox="1"/>
-          <p:nvPr/>
-        </p:nvSpPr>
-        <p:spPr>
-          <a:xfrm>
-            <a:off x="594360" y="4251960"/>
-            <a:ext cx="11002975" cy="347472"/>
-          </a:xfrm>
-          <a:prstGeom prst="rect">
-            <a:avLst/>
-          </a:prstGeom>
-          <a:noFill/>
-        </p:spPr>
-        <p:txBody>
-          <a:bodyPr wrap="square">
-            <a:spAutoFit/>
-          </a:bodyPr>
-          <a:lstStyle/>
-          <a:p>
-            <a:pPr algn="ctr"/>
-            <a:r>
-              <a:rPr sz="2200" b="0" i="1">
-                <a:solidFill>
-                  <a:srgbClr val="8C8C8C"/>
-                </a:solidFill>
-                <a:latin typeface="Arial"/>
-              </a:rPr>
-              <a:t/>
             </a:r>
           </a:p>
         </p:txBody>
@@ -4887,23 +4362,23 @@
         </p:nvSpPr>
         <p:spPr>
           <a:xfrm>
-            <a:off x="594360" y="2258568"/>
-            <a:ext cx="11002975" cy="685800"/>
-          </a:xfrm>
-          <a:prstGeom prst="rect">
-            <a:avLst/>
-          </a:prstGeom>
-          <a:noFill/>
-        </p:spPr>
-        <p:txBody>
-          <a:bodyPr wrap="square">
-            <a:spAutoFit/>
-          </a:bodyPr>
-          <a:lstStyle/>
-          <a:p>
-            <a:pPr algn="ctr"/>
-            <a:r>
-              <a:rPr sz="4400" b="1" i="0">
+            <a:off x="640080" y="2052828"/>
+            <a:ext cx="10911535" cy="731520"/>
+          </a:xfrm>
+          <a:prstGeom prst="rect">
+            <a:avLst/>
+          </a:prstGeom>
+          <a:noFill/>
+        </p:spPr>
+        <p:txBody>
+          <a:bodyPr wrap="square">
+            <a:spAutoFit/>
+          </a:bodyPr>
+          <a:lstStyle/>
+          <a:p>
+            <a:pPr algn="ctr"/>
+            <a:r>
+              <a:rPr sz="4800" b="1" i="0">
                 <a:solidFill>
                   <a:srgbClr val="FFFFFF"/>
                 </a:solidFill>
@@ -4922,99 +4397,29 @@
         </p:nvSpPr>
         <p:spPr>
           <a:xfrm>
-            <a:off x="594360" y="2980944"/>
-            <a:ext cx="11002975" cy="347472"/>
-          </a:xfrm>
-          <a:prstGeom prst="rect">
-            <a:avLst/>
-          </a:prstGeom>
-          <a:noFill/>
-        </p:spPr>
-        <p:txBody>
-          <a:bodyPr wrap="square">
-            <a:spAutoFit/>
-          </a:bodyPr>
-          <a:lstStyle/>
-          <a:p>
-            <a:pPr algn="ctr"/>
-            <a:r>
-              <a:rPr sz="2200" b="0" i="1">
-                <a:solidFill>
-                  <a:srgbClr val="8C8C8C"/>
-                </a:solidFill>
-                <a:latin typeface="Arial"/>
-              </a:rPr>
-              <a:t/>
-            </a:r>
-          </a:p>
-        </p:txBody>
-      </p:sp>
-      <p:sp>
-        <p:nvSpPr>
-          <p:cNvPr id="4" name="TextBox 3"/>
-          <p:cNvSpPr txBox="1"/>
-          <p:nvPr/>
-        </p:nvSpPr>
-        <p:spPr>
-          <a:xfrm>
-            <a:off x="594360" y="3529584"/>
-            <a:ext cx="11002975" cy="685800"/>
-          </a:xfrm>
-          <a:prstGeom prst="rect">
-            <a:avLst/>
-          </a:prstGeom>
-          <a:noFill/>
-        </p:spPr>
-        <p:txBody>
-          <a:bodyPr wrap="square">
-            <a:spAutoFit/>
-          </a:bodyPr>
-          <a:lstStyle/>
-          <a:p>
-            <a:pPr algn="ctr"/>
-            <a:r>
-              <a:rPr sz="4400" b="1" i="0">
+            <a:off x="640080" y="2985516"/>
+            <a:ext cx="10911535" cy="731520"/>
+          </a:xfrm>
+          <a:prstGeom prst="rect">
+            <a:avLst/>
+          </a:prstGeom>
+          <a:noFill/>
+        </p:spPr>
+        <p:txBody>
+          <a:bodyPr wrap="square">
+            <a:spAutoFit/>
+          </a:bodyPr>
+          <a:lstStyle/>
+          <a:p>
+            <a:pPr algn="ctr"/>
+            <a:r>
+              <a:rPr sz="4800" b="1" i="0">
                 <a:solidFill>
                   <a:srgbClr val="FFFFFF"/>
                 </a:solidFill>
                 <a:latin typeface="Arial"/>
               </a:rPr>
               <a:t>Quando as trevas se aproximam</a:t>
-            </a:r>
-          </a:p>
-        </p:txBody>
-      </p:sp>
-      <p:sp>
-        <p:nvSpPr>
-          <p:cNvPr id="5" name="TextBox 4"/>
-          <p:cNvSpPr txBox="1"/>
-          <p:nvPr/>
-        </p:nvSpPr>
-        <p:spPr>
-          <a:xfrm>
-            <a:off x="594360" y="4251960"/>
-            <a:ext cx="11002975" cy="347472"/>
-          </a:xfrm>
-          <a:prstGeom prst="rect">
-            <a:avLst/>
-          </a:prstGeom>
-          <a:noFill/>
-        </p:spPr>
-        <p:txBody>
-          <a:bodyPr wrap="square">
-            <a:spAutoFit/>
-          </a:bodyPr>
-          <a:lstStyle/>
-          <a:p>
-            <a:pPr algn="ctr"/>
-            <a:r>
-              <a:rPr sz="2200" b="0" i="1">
-                <a:solidFill>
-                  <a:srgbClr val="8C8C8C"/>
-                </a:solidFill>
-                <a:latin typeface="Arial"/>
-              </a:rPr>
-              <a:t/>
             </a:r>
           </a:p>
         </p:txBody>
@@ -5053,23 +4458,23 @@
         </p:nvSpPr>
         <p:spPr>
           <a:xfrm>
-            <a:off x="594360" y="2258568"/>
-            <a:ext cx="11002975" cy="685800"/>
-          </a:xfrm>
-          <a:prstGeom prst="rect">
-            <a:avLst/>
-          </a:prstGeom>
-          <a:noFill/>
-        </p:spPr>
-        <p:txBody>
-          <a:bodyPr wrap="square">
-            <a:spAutoFit/>
-          </a:bodyPr>
-          <a:lstStyle/>
-          <a:p>
-            <a:pPr algn="ctr"/>
-            <a:r>
-              <a:rPr sz="4400" b="1" i="0">
+            <a:off x="640080" y="2052828"/>
+            <a:ext cx="10911535" cy="731520"/>
+          </a:xfrm>
+          <a:prstGeom prst="rect">
+            <a:avLst/>
+          </a:prstGeom>
+          <a:noFill/>
+        </p:spPr>
+        <p:txBody>
+          <a:bodyPr wrap="square">
+            <a:spAutoFit/>
+          </a:bodyPr>
+          <a:lstStyle/>
+          <a:p>
+            <a:pPr algn="ctr"/>
+            <a:r>
+              <a:rPr sz="4800" b="1" i="0">
                 <a:solidFill>
                   <a:srgbClr val="FFFFFF"/>
                 </a:solidFill>
@@ -5088,99 +4493,29 @@
         </p:nvSpPr>
         <p:spPr>
           <a:xfrm>
-            <a:off x="594360" y="2980944"/>
-            <a:ext cx="11002975" cy="347472"/>
-          </a:xfrm>
-          <a:prstGeom prst="rect">
-            <a:avLst/>
-          </a:prstGeom>
-          <a:noFill/>
-        </p:spPr>
-        <p:txBody>
-          <a:bodyPr wrap="square">
-            <a:spAutoFit/>
-          </a:bodyPr>
-          <a:lstStyle/>
-          <a:p>
-            <a:pPr algn="ctr"/>
-            <a:r>
-              <a:rPr sz="2200" b="0" i="1">
-                <a:solidFill>
-                  <a:srgbClr val="8C8C8C"/>
-                </a:solidFill>
-                <a:latin typeface="Arial"/>
-              </a:rPr>
-              <a:t/>
-            </a:r>
-          </a:p>
-        </p:txBody>
-      </p:sp>
-      <p:sp>
-        <p:nvSpPr>
-          <p:cNvPr id="4" name="TextBox 3"/>
-          <p:cNvSpPr txBox="1"/>
-          <p:nvPr/>
-        </p:nvSpPr>
-        <p:spPr>
-          <a:xfrm>
-            <a:off x="594360" y="3529584"/>
-            <a:ext cx="11002975" cy="685800"/>
-          </a:xfrm>
-          <a:prstGeom prst="rect">
-            <a:avLst/>
-          </a:prstGeom>
-          <a:noFill/>
-        </p:spPr>
-        <p:txBody>
-          <a:bodyPr wrap="square">
-            <a:spAutoFit/>
-          </a:bodyPr>
-          <a:lstStyle/>
-          <a:p>
-            <a:pPr algn="ctr"/>
-            <a:r>
-              <a:rPr sz="4400" b="1" i="0">
+            <a:off x="640080" y="2985516"/>
+            <a:ext cx="10911535" cy="731520"/>
+          </a:xfrm>
+          <a:prstGeom prst="rect">
+            <a:avLst/>
+          </a:prstGeom>
+          <a:noFill/>
+        </p:spPr>
+        <p:txBody>
+          <a:bodyPr wrap="square">
+            <a:spAutoFit/>
+          </a:bodyPr>
+          <a:lstStyle/>
+          <a:p>
+            <a:pPr algn="ctr"/>
+            <a:r>
+              <a:rPr sz="4800" b="1" i="0">
                 <a:solidFill>
                   <a:srgbClr val="FFFFFF"/>
                 </a:solidFill>
                 <a:latin typeface="Arial"/>
               </a:rPr>
               <a:t>Tu és mais, Tu és mais</a:t>
-            </a:r>
-          </a:p>
-        </p:txBody>
-      </p:sp>
-      <p:sp>
-        <p:nvSpPr>
-          <p:cNvPr id="5" name="TextBox 4"/>
-          <p:cNvSpPr txBox="1"/>
-          <p:nvPr/>
-        </p:nvSpPr>
-        <p:spPr>
-          <a:xfrm>
-            <a:off x="594360" y="4251960"/>
-            <a:ext cx="11002975" cy="347472"/>
-          </a:xfrm>
-          <a:prstGeom prst="rect">
-            <a:avLst/>
-          </a:prstGeom>
-          <a:noFill/>
-        </p:spPr>
-        <p:txBody>
-          <a:bodyPr wrap="square">
-            <a:spAutoFit/>
-          </a:bodyPr>
-          <a:lstStyle/>
-          <a:p>
-            <a:pPr algn="ctr"/>
-            <a:r>
-              <a:rPr sz="2200" b="0" i="1">
-                <a:solidFill>
-                  <a:srgbClr val="8C8C8C"/>
-                </a:solidFill>
-                <a:latin typeface="Arial"/>
-              </a:rPr>
-              <a:t/>
             </a:r>
           </a:p>
         </p:txBody>
@@ -5219,23 +4554,23 @@
         </p:nvSpPr>
         <p:spPr>
           <a:xfrm>
-            <a:off x="594360" y="1837944"/>
-            <a:ext cx="11002975" cy="685800"/>
-          </a:xfrm>
-          <a:prstGeom prst="rect">
-            <a:avLst/>
-          </a:prstGeom>
-          <a:noFill/>
-        </p:spPr>
-        <p:txBody>
-          <a:bodyPr wrap="square">
-            <a:spAutoFit/>
-          </a:bodyPr>
-          <a:lstStyle/>
-          <a:p>
-            <a:pPr algn="ctr"/>
-            <a:r>
-              <a:rPr sz="4400" b="1" i="0">
+            <a:off x="640080" y="1650492"/>
+            <a:ext cx="10911535" cy="731520"/>
+          </a:xfrm>
+          <a:prstGeom prst="rect">
+            <a:avLst/>
+          </a:prstGeom>
+          <a:noFill/>
+        </p:spPr>
+        <p:txBody>
+          <a:bodyPr wrap="square">
+            <a:spAutoFit/>
+          </a:bodyPr>
+          <a:lstStyle/>
+          <a:p>
+            <a:pPr algn="ctr"/>
+            <a:r>
+              <a:rPr sz="4800" b="1" i="0">
                 <a:solidFill>
                   <a:srgbClr val="FFFFFF"/>
                 </a:solidFill>
@@ -5254,8 +4589,8 @@
         </p:nvSpPr>
         <p:spPr>
           <a:xfrm>
-            <a:off x="594360" y="2560320"/>
-            <a:ext cx="11002975" cy="384048"/>
+            <a:off x="640080" y="2418588"/>
+            <a:ext cx="10911535" cy="365760"/>
           </a:xfrm>
           <a:prstGeom prst="rect">
             <a:avLst/>
@@ -5272,7 +4607,7 @@
             <a:r>
               <a:rPr sz="2400" b="0" i="1">
                 <a:solidFill>
-                  <a:srgbClr val="B4B4B4"/>
+                  <a:srgbClr val="AAAAAA"/>
                 </a:solidFill>
                 <a:latin typeface="Arial"/>
               </a:rPr>
@@ -5289,8 +4624,78 @@
         </p:nvSpPr>
         <p:spPr>
           <a:xfrm>
-            <a:off x="594360" y="2980944"/>
-            <a:ext cx="11002975" cy="347472"/>
+            <a:off x="640080" y="2985516"/>
+            <a:ext cx="10911535" cy="731520"/>
+          </a:xfrm>
+          <a:prstGeom prst="rect">
+            <a:avLst/>
+          </a:prstGeom>
+          <a:noFill/>
+        </p:spPr>
+        <p:txBody>
+          <a:bodyPr wrap="square">
+            <a:spAutoFit/>
+          </a:bodyPr>
+          <a:lstStyle/>
+          <a:p>
+            <a:pPr algn="ctr"/>
+            <a:r>
+              <a:rPr sz="4800" b="1" i="0">
+                <a:solidFill>
+                  <a:srgbClr val="FFFFFF"/>
+                </a:solidFill>
+                <a:latin typeface="Arial"/>
+              </a:rPr>
+              <a:t>愛にみちた    永遠の手</a:t>
+            </a:r>
+          </a:p>
+        </p:txBody>
+      </p:sp>
+      <p:sp>
+        <p:nvSpPr>
+          <p:cNvPr id="5" name="TextBox 4"/>
+          <p:cNvSpPr txBox="1"/>
+          <p:nvPr/>
+        </p:nvSpPr>
+        <p:spPr>
+          <a:xfrm>
+            <a:off x="640080" y="3753612"/>
+            <a:ext cx="10911535" cy="365760"/>
+          </a:xfrm>
+          <a:prstGeom prst="rect">
+            <a:avLst/>
+          </a:prstGeom>
+          <a:noFill/>
+        </p:spPr>
+        <p:txBody>
+          <a:bodyPr wrap="square">
+            <a:spAutoFit/>
+          </a:bodyPr>
+          <a:lstStyle/>
+          <a:p>
+            <a:pPr algn="ctr"/>
+            <a:r>
+              <a:rPr sz="2400" b="0" i="1">
+                <a:solidFill>
+                  <a:srgbClr val="AAAAAA"/>
+                </a:solidFill>
+                <a:latin typeface="Arial"/>
+              </a:rPr>
+              <a:t>ai ni michita  eien no te</a:t>
+            </a:r>
+          </a:p>
+        </p:txBody>
+      </p:sp>
+      <p:sp>
+        <p:nvSpPr>
+          <p:cNvPr id="6" name="TextBox 5"/>
+          <p:cNvSpPr txBox="1"/>
+          <p:nvPr/>
+        </p:nvSpPr>
+        <p:spPr>
+          <a:xfrm>
+            <a:off x="640080" y="4530852"/>
+            <a:ext cx="10911535" cy="310896"/>
           </a:xfrm>
           <a:prstGeom prst="rect">
             <a:avLst/>
@@ -5307,7 +4712,7 @@
             <a:r>
               <a:rPr sz="2000" b="0" i="1">
                 <a:solidFill>
-                  <a:srgbClr val="8C8C8C"/>
+                  <a:srgbClr val="828282"/>
                 </a:solidFill>
                 <a:latin typeface="Arial"/>
               </a:rPr>
@@ -5318,84 +4723,14 @@
       </p:sp>
       <p:sp>
         <p:nvSpPr>
-          <p:cNvPr id="5" name="TextBox 4"/>
-          <p:cNvSpPr txBox="1"/>
-          <p:nvPr/>
-        </p:nvSpPr>
-        <p:spPr>
-          <a:xfrm>
-            <a:off x="594360" y="3529584"/>
-            <a:ext cx="11002975" cy="685800"/>
-          </a:xfrm>
-          <a:prstGeom prst="rect">
-            <a:avLst/>
-          </a:prstGeom>
-          <a:noFill/>
-        </p:spPr>
-        <p:txBody>
-          <a:bodyPr wrap="square">
-            <a:spAutoFit/>
-          </a:bodyPr>
-          <a:lstStyle/>
-          <a:p>
-            <a:pPr algn="ctr"/>
-            <a:r>
-              <a:rPr sz="4400" b="1" i="0">
-                <a:solidFill>
-                  <a:srgbClr val="FFFFFF"/>
-                </a:solidFill>
-                <a:latin typeface="Arial"/>
-              </a:rPr>
-              <a:t>愛にみちた    永遠の手</a:t>
-            </a:r>
-          </a:p>
-        </p:txBody>
-      </p:sp>
-      <p:sp>
-        <p:nvSpPr>
-          <p:cNvPr id="6" name="TextBox 5"/>
-          <p:cNvSpPr txBox="1"/>
-          <p:nvPr/>
-        </p:nvSpPr>
-        <p:spPr>
-          <a:xfrm>
-            <a:off x="594360" y="4251960"/>
-            <a:ext cx="11002975" cy="384048"/>
-          </a:xfrm>
-          <a:prstGeom prst="rect">
-            <a:avLst/>
-          </a:prstGeom>
-          <a:noFill/>
-        </p:spPr>
-        <p:txBody>
-          <a:bodyPr wrap="square">
-            <a:spAutoFit/>
-          </a:bodyPr>
-          <a:lstStyle/>
-          <a:p>
-            <a:pPr algn="ctr"/>
-            <a:r>
-              <a:rPr sz="2400" b="0" i="1">
-                <a:solidFill>
-                  <a:srgbClr val="B4B4B4"/>
-                </a:solidFill>
-                <a:latin typeface="Arial"/>
-              </a:rPr>
-              <a:t>ai ni michita  eien no te</a:t>
-            </a:r>
-          </a:p>
-        </p:txBody>
-      </p:sp>
-      <p:sp>
-        <p:nvSpPr>
           <p:cNvPr id="7" name="TextBox 6"/>
           <p:cNvSpPr txBox="1"/>
           <p:nvPr/>
         </p:nvSpPr>
         <p:spPr>
           <a:xfrm>
-            <a:off x="594360" y="4672584"/>
-            <a:ext cx="11002975" cy="347472"/>
+            <a:off x="640080" y="4896612"/>
+            <a:ext cx="10911535" cy="310896"/>
           </a:xfrm>
           <a:prstGeom prst="rect">
             <a:avLst/>
@@ -5412,7 +4747,7 @@
             <a:r>
               <a:rPr sz="2000" b="0" i="1">
                 <a:solidFill>
-                  <a:srgbClr val="8C8C8C"/>
+                  <a:srgbClr val="828282"/>
                 </a:solidFill>
                 <a:latin typeface="Arial"/>
               </a:rPr>
@@ -5455,23 +4790,23 @@
         </p:nvSpPr>
         <p:spPr>
           <a:xfrm>
-            <a:off x="594360" y="2683764"/>
-            <a:ext cx="11002975" cy="685800"/>
-          </a:xfrm>
-          <a:prstGeom prst="rect">
-            <a:avLst/>
-          </a:prstGeom>
-          <a:noFill/>
-        </p:spPr>
-        <p:txBody>
-          <a:bodyPr wrap="square">
-            <a:spAutoFit/>
-          </a:bodyPr>
-          <a:lstStyle/>
-          <a:p>
-            <a:pPr algn="ctr"/>
-            <a:r>
-              <a:rPr sz="4400" b="1" i="0">
+            <a:off x="640080" y="2500884"/>
+            <a:ext cx="10911535" cy="731520"/>
+          </a:xfrm>
+          <a:prstGeom prst="rect">
+            <a:avLst/>
+          </a:prstGeom>
+          <a:noFill/>
+        </p:spPr>
+        <p:txBody>
+          <a:bodyPr wrap="square">
+            <a:spAutoFit/>
+          </a:bodyPr>
+          <a:lstStyle/>
+          <a:p>
+            <a:pPr algn="ctr"/>
+            <a:r>
+              <a:rPr sz="4800" b="1" i="0">
                 <a:solidFill>
                   <a:srgbClr val="FFFFFF"/>
                 </a:solidFill>
@@ -5490,25 +4825,25 @@
         </p:nvSpPr>
         <p:spPr>
           <a:xfrm>
-            <a:off x="594360" y="3406140"/>
-            <a:ext cx="11002975" cy="384048"/>
-          </a:xfrm>
-          <a:prstGeom prst="rect">
-            <a:avLst/>
-          </a:prstGeom>
-          <a:noFill/>
-        </p:spPr>
-        <p:txBody>
-          <a:bodyPr wrap="square">
-            <a:spAutoFit/>
-          </a:bodyPr>
-          <a:lstStyle/>
-          <a:p>
-            <a:pPr algn="ctr"/>
-            <a:r>
-              <a:rPr sz="2344" b="0" i="1">
-                <a:solidFill>
-                  <a:srgbClr val="B4B4B4"/>
+            <a:off x="640080" y="3268980"/>
+            <a:ext cx="10911535" cy="365760"/>
+          </a:xfrm>
+          <a:prstGeom prst="rect">
+            <a:avLst/>
+          </a:prstGeom>
+          <a:noFill/>
+        </p:spPr>
+        <p:txBody>
+          <a:bodyPr wrap="square">
+            <a:spAutoFit/>
+          </a:bodyPr>
+          <a:lstStyle/>
+          <a:p>
+            <a:pPr algn="ctr"/>
+            <a:r>
+              <a:rPr sz="2400" b="0" i="1">
+                <a:solidFill>
+                  <a:srgbClr val="AAAAAA"/>
                 </a:solidFill>
                 <a:latin typeface="Arial"/>
               </a:rPr>
@@ -5525,8 +4860,8 @@
         </p:nvSpPr>
         <p:spPr>
           <a:xfrm>
-            <a:off x="594360" y="3826764"/>
-            <a:ext cx="11002975" cy="347472"/>
+            <a:off x="640080" y="4046220"/>
+            <a:ext cx="10911535" cy="310896"/>
           </a:xfrm>
           <a:prstGeom prst="rect">
             <a:avLst/>
@@ -5543,7 +4878,7 @@
             <a:r>
               <a:rPr sz="2000" b="0" i="1">
                 <a:solidFill>
-                  <a:srgbClr val="8C8C8C"/>
+                  <a:srgbClr val="828282"/>
                 </a:solidFill>
                 <a:latin typeface="Arial"/>
               </a:rPr>
@@ -5586,23 +4921,23 @@
         </p:nvSpPr>
         <p:spPr>
           <a:xfrm>
-            <a:off x="594360" y="2258568"/>
-            <a:ext cx="11002975" cy="685800"/>
-          </a:xfrm>
-          <a:prstGeom prst="rect">
-            <a:avLst/>
-          </a:prstGeom>
-          <a:noFill/>
-        </p:spPr>
-        <p:txBody>
-          <a:bodyPr wrap="square">
-            <a:spAutoFit/>
-          </a:bodyPr>
-          <a:lstStyle/>
-          <a:p>
-            <a:pPr algn="ctr"/>
-            <a:r>
-              <a:rPr sz="4400" b="1" i="0">
+            <a:off x="640080" y="2052828"/>
+            <a:ext cx="10911535" cy="731520"/>
+          </a:xfrm>
+          <a:prstGeom prst="rect">
+            <a:avLst/>
+          </a:prstGeom>
+          <a:noFill/>
+        </p:spPr>
+        <p:txBody>
+          <a:bodyPr wrap="square">
+            <a:spAutoFit/>
+          </a:bodyPr>
+          <a:lstStyle/>
+          <a:p>
+            <a:pPr algn="ctr"/>
+            <a:r>
+              <a:rPr sz="4800" b="1" i="0">
                 <a:solidFill>
                   <a:srgbClr val="FFFFFF"/>
                 </a:solidFill>
@@ -5621,99 +4956,29 @@
         </p:nvSpPr>
         <p:spPr>
           <a:xfrm>
-            <a:off x="594360" y="2980944"/>
-            <a:ext cx="11002975" cy="347472"/>
-          </a:xfrm>
-          <a:prstGeom prst="rect">
-            <a:avLst/>
-          </a:prstGeom>
-          <a:noFill/>
-        </p:spPr>
-        <p:txBody>
-          <a:bodyPr wrap="square">
-            <a:spAutoFit/>
-          </a:bodyPr>
-          <a:lstStyle/>
-          <a:p>
-            <a:pPr algn="ctr"/>
-            <a:r>
-              <a:rPr sz="2200" b="0" i="1">
-                <a:solidFill>
-                  <a:srgbClr val="8C8C8C"/>
-                </a:solidFill>
-                <a:latin typeface="Arial"/>
-              </a:rPr>
-              <a:t/>
-            </a:r>
-          </a:p>
-        </p:txBody>
-      </p:sp>
-      <p:sp>
-        <p:nvSpPr>
-          <p:cNvPr id="4" name="TextBox 3"/>
-          <p:cNvSpPr txBox="1"/>
-          <p:nvPr/>
-        </p:nvSpPr>
-        <p:spPr>
-          <a:xfrm>
-            <a:off x="594360" y="3529584"/>
-            <a:ext cx="11002975" cy="685800"/>
-          </a:xfrm>
-          <a:prstGeom prst="rect">
-            <a:avLst/>
-          </a:prstGeom>
-          <a:noFill/>
-        </p:spPr>
-        <p:txBody>
-          <a:bodyPr wrap="square">
-            <a:spAutoFit/>
-          </a:bodyPr>
-          <a:lstStyle/>
-          <a:p>
-            <a:pPr algn="ctr"/>
-            <a:r>
-              <a:rPr sz="4141" b="1" i="0">
+            <a:off x="640080" y="2985516"/>
+            <a:ext cx="10911535" cy="731520"/>
+          </a:xfrm>
+          <a:prstGeom prst="rect">
+            <a:avLst/>
+          </a:prstGeom>
+          <a:noFill/>
+        </p:spPr>
+        <p:txBody>
+          <a:bodyPr wrap="square">
+            <a:spAutoFit/>
+          </a:bodyPr>
+          <a:lstStyle/>
+          <a:p>
+            <a:pPr algn="ctr"/>
+            <a:r>
+              <a:rPr sz="4500" b="1" i="0">
                 <a:solidFill>
                   <a:srgbClr val="FFFFFF"/>
                 </a:solidFill>
                 <a:latin typeface="Arial"/>
               </a:rPr>
               <a:t>Estou correndo para os Teus braços</a:t>
-            </a:r>
-          </a:p>
-        </p:txBody>
-      </p:sp>
-      <p:sp>
-        <p:nvSpPr>
-          <p:cNvPr id="5" name="TextBox 4"/>
-          <p:cNvSpPr txBox="1"/>
-          <p:nvPr/>
-        </p:nvSpPr>
-        <p:spPr>
-          <a:xfrm>
-            <a:off x="594360" y="4251960"/>
-            <a:ext cx="11002975" cy="347472"/>
-          </a:xfrm>
-          <a:prstGeom prst="rect">
-            <a:avLst/>
-          </a:prstGeom>
-          <a:noFill/>
-        </p:spPr>
-        <p:txBody>
-          <a:bodyPr wrap="square">
-            <a:spAutoFit/>
-          </a:bodyPr>
-          <a:lstStyle/>
-          <a:p>
-            <a:pPr algn="ctr"/>
-            <a:r>
-              <a:rPr sz="2200" b="0" i="1">
-                <a:solidFill>
-                  <a:srgbClr val="8C8C8C"/>
-                </a:solidFill>
-                <a:latin typeface="Arial"/>
-              </a:rPr>
-              <a:t/>
             </a:r>
           </a:p>
         </p:txBody>
@@ -5752,23 +5017,23 @@
         </p:nvSpPr>
         <p:spPr>
           <a:xfrm>
-            <a:off x="594360" y="2258568"/>
-            <a:ext cx="11002975" cy="685800"/>
-          </a:xfrm>
-          <a:prstGeom prst="rect">
-            <a:avLst/>
-          </a:prstGeom>
-          <a:noFill/>
-        </p:spPr>
-        <p:txBody>
-          <a:bodyPr wrap="square">
-            <a:spAutoFit/>
-          </a:bodyPr>
-          <a:lstStyle/>
-          <a:p>
-            <a:pPr algn="ctr"/>
-            <a:r>
-              <a:rPr sz="4141" b="1" i="0">
+            <a:off x="640080" y="2052828"/>
+            <a:ext cx="10911535" cy="731520"/>
+          </a:xfrm>
+          <a:prstGeom prst="rect">
+            <a:avLst/>
+          </a:prstGeom>
+          <a:noFill/>
+        </p:spPr>
+        <p:txBody>
+          <a:bodyPr wrap="square">
+            <a:spAutoFit/>
+          </a:bodyPr>
+          <a:lstStyle/>
+          <a:p>
+            <a:pPr algn="ctr"/>
+            <a:r>
+              <a:rPr sz="4500" b="1" i="0">
                 <a:solidFill>
                   <a:srgbClr val="FFFFFF"/>
                 </a:solidFill>
@@ -5787,99 +5052,29 @@
         </p:nvSpPr>
         <p:spPr>
           <a:xfrm>
-            <a:off x="594360" y="2980944"/>
-            <a:ext cx="11002975" cy="347472"/>
-          </a:xfrm>
-          <a:prstGeom prst="rect">
-            <a:avLst/>
-          </a:prstGeom>
-          <a:noFill/>
-        </p:spPr>
-        <p:txBody>
-          <a:bodyPr wrap="square">
-            <a:spAutoFit/>
-          </a:bodyPr>
-          <a:lstStyle/>
-          <a:p>
-            <a:pPr algn="ctr"/>
-            <a:r>
-              <a:rPr sz="2200" b="0" i="1">
-                <a:solidFill>
-                  <a:srgbClr val="8C8C8C"/>
-                </a:solidFill>
-                <a:latin typeface="Arial"/>
-              </a:rPr>
-              <a:t/>
-            </a:r>
-          </a:p>
-        </p:txBody>
-      </p:sp>
-      <p:sp>
-        <p:nvSpPr>
-          <p:cNvPr id="4" name="TextBox 3"/>
-          <p:cNvSpPr txBox="1"/>
-          <p:nvPr/>
-        </p:nvSpPr>
-        <p:spPr>
-          <a:xfrm>
-            <a:off x="594360" y="3529584"/>
-            <a:ext cx="11002975" cy="685800"/>
-          </a:xfrm>
-          <a:prstGeom prst="rect">
-            <a:avLst/>
-          </a:prstGeom>
-          <a:noFill/>
-        </p:spPr>
-        <p:txBody>
-          <a:bodyPr wrap="square">
-            <a:spAutoFit/>
-          </a:bodyPr>
-          <a:lstStyle/>
-          <a:p>
-            <a:pPr algn="ctr"/>
-            <a:r>
-              <a:rPr sz="4400" b="1" i="0">
+            <a:off x="640080" y="2985516"/>
+            <a:ext cx="10911535" cy="731520"/>
+          </a:xfrm>
+          <a:prstGeom prst="rect">
+            <a:avLst/>
+          </a:prstGeom>
+          <a:noFill/>
+        </p:spPr>
+        <p:txBody>
+          <a:bodyPr wrap="square">
+            <a:spAutoFit/>
+          </a:bodyPr>
+          <a:lstStyle/>
+          <a:p>
+            <a:pPr algn="ctr"/>
+            <a:r>
+              <a:rPr sz="4800" b="1" i="0">
                 <a:solidFill>
                   <a:srgbClr val="FFFFFF"/>
                 </a:solidFill>
                 <a:latin typeface="Arial"/>
               </a:rPr>
               <a:t>A riqueza do Teu amor</a:t>
-            </a:r>
-          </a:p>
-        </p:txBody>
-      </p:sp>
-      <p:sp>
-        <p:nvSpPr>
-          <p:cNvPr id="5" name="TextBox 4"/>
-          <p:cNvSpPr txBox="1"/>
-          <p:nvPr/>
-        </p:nvSpPr>
-        <p:spPr>
-          <a:xfrm>
-            <a:off x="594360" y="4251960"/>
-            <a:ext cx="11002975" cy="347472"/>
-          </a:xfrm>
-          <a:prstGeom prst="rect">
-            <a:avLst/>
-          </a:prstGeom>
-          <a:noFill/>
-        </p:spPr>
-        <p:txBody>
-          <a:bodyPr wrap="square">
-            <a:spAutoFit/>
-          </a:bodyPr>
-          <a:lstStyle/>
-          <a:p>
-            <a:pPr algn="ctr"/>
-            <a:r>
-              <a:rPr sz="2200" b="0" i="1">
-                <a:solidFill>
-                  <a:srgbClr val="8C8C8C"/>
-                </a:solidFill>
-                <a:latin typeface="Arial"/>
-              </a:rPr>
-              <a:t/>
             </a:r>
           </a:p>
         </p:txBody>
@@ -5918,23 +5113,23 @@
         </p:nvSpPr>
         <p:spPr>
           <a:xfrm>
-            <a:off x="594360" y="2258568"/>
-            <a:ext cx="11002975" cy="685800"/>
-          </a:xfrm>
-          <a:prstGeom prst="rect">
-            <a:avLst/>
-          </a:prstGeom>
-          <a:noFill/>
-        </p:spPr>
-        <p:txBody>
-          <a:bodyPr wrap="square">
-            <a:spAutoFit/>
-          </a:bodyPr>
-          <a:lstStyle/>
-          <a:p>
-            <a:pPr algn="ctr"/>
-            <a:r>
-              <a:rPr sz="4400" b="1" i="0">
+            <a:off x="640080" y="2052828"/>
+            <a:ext cx="10911535" cy="731520"/>
+          </a:xfrm>
+          <a:prstGeom prst="rect">
+            <a:avLst/>
+          </a:prstGeom>
+          <a:noFill/>
+        </p:spPr>
+        <p:txBody>
+          <a:bodyPr wrap="square">
+            <a:spAutoFit/>
+          </a:bodyPr>
+          <a:lstStyle/>
+          <a:p>
+            <a:pPr algn="ctr"/>
+            <a:r>
+              <a:rPr sz="4800" b="1" i="0">
                 <a:solidFill>
                   <a:srgbClr val="FFFFFF"/>
                 </a:solidFill>
@@ -5953,99 +5148,29 @@
         </p:nvSpPr>
         <p:spPr>
           <a:xfrm>
-            <a:off x="594360" y="2980944"/>
-            <a:ext cx="11002975" cy="347472"/>
-          </a:xfrm>
-          <a:prstGeom prst="rect">
-            <a:avLst/>
-          </a:prstGeom>
-          <a:noFill/>
-        </p:spPr>
-        <p:txBody>
-          <a:bodyPr wrap="square">
-            <a:spAutoFit/>
-          </a:bodyPr>
-          <a:lstStyle/>
-          <a:p>
-            <a:pPr algn="ctr"/>
-            <a:r>
-              <a:rPr sz="2200" b="0" i="1">
-                <a:solidFill>
-                  <a:srgbClr val="8C8C8C"/>
-                </a:solidFill>
-                <a:latin typeface="Arial"/>
-              </a:rPr>
-              <a:t/>
-            </a:r>
-          </a:p>
-        </p:txBody>
-      </p:sp>
-      <p:sp>
-        <p:nvSpPr>
-          <p:cNvPr id="4" name="TextBox 3"/>
-          <p:cNvSpPr txBox="1"/>
-          <p:nvPr/>
-        </p:nvSpPr>
-        <p:spPr>
-          <a:xfrm>
-            <a:off x="594360" y="3529584"/>
-            <a:ext cx="11002975" cy="685800"/>
-          </a:xfrm>
-          <a:prstGeom prst="rect">
-            <a:avLst/>
-          </a:prstGeom>
-          <a:noFill/>
-        </p:spPr>
-        <p:txBody>
-          <a:bodyPr wrap="square">
-            <a:spAutoFit/>
-          </a:bodyPr>
-          <a:lstStyle/>
-          <a:p>
-            <a:pPr algn="ctr"/>
-            <a:r>
-              <a:rPr sz="4400" b="1" i="0">
+            <a:off x="640080" y="2985516"/>
+            <a:ext cx="10911535" cy="731520"/>
+          </a:xfrm>
+          <a:prstGeom prst="rect">
+            <a:avLst/>
+          </a:prstGeom>
+          <a:noFill/>
+        </p:spPr>
+        <p:txBody>
+          <a:bodyPr wrap="square">
+            <a:spAutoFit/>
+          </a:bodyPr>
+          <a:lstStyle/>
+          <a:p>
+            <a:pPr algn="ctr"/>
+            <a:r>
+              <a:rPr sz="4800" b="1" i="0">
                 <a:solidFill>
                   <a:srgbClr val="FFFFFF"/>
                 </a:solidFill>
                 <a:latin typeface="Arial"/>
               </a:rPr>
               <a:t>Nada se compara ao Teu abraço</a:t>
-            </a:r>
-          </a:p>
-        </p:txBody>
-      </p:sp>
-      <p:sp>
-        <p:nvSpPr>
-          <p:cNvPr id="5" name="TextBox 4"/>
-          <p:cNvSpPr txBox="1"/>
-          <p:nvPr/>
-        </p:nvSpPr>
-        <p:spPr>
-          <a:xfrm>
-            <a:off x="594360" y="4251960"/>
-            <a:ext cx="11002975" cy="347472"/>
-          </a:xfrm>
-          <a:prstGeom prst="rect">
-            <a:avLst/>
-          </a:prstGeom>
-          <a:noFill/>
-        </p:spPr>
-        <p:txBody>
-          <a:bodyPr wrap="square">
-            <a:spAutoFit/>
-          </a:bodyPr>
-          <a:lstStyle/>
-          <a:p>
-            <a:pPr algn="ctr"/>
-            <a:r>
-              <a:rPr sz="2200" b="0" i="1">
-                <a:solidFill>
-                  <a:srgbClr val="8C8C8C"/>
-                </a:solidFill>
-                <a:latin typeface="Arial"/>
-              </a:rPr>
-              <a:t/>
             </a:r>
           </a:p>
         </p:txBody>
@@ -6084,23 +5209,23 @@
         </p:nvSpPr>
         <p:spPr>
           <a:xfrm>
-            <a:off x="594360" y="2258568"/>
-            <a:ext cx="11002975" cy="685800"/>
-          </a:xfrm>
-          <a:prstGeom prst="rect">
-            <a:avLst/>
-          </a:prstGeom>
-          <a:noFill/>
-        </p:spPr>
-        <p:txBody>
-          <a:bodyPr wrap="square">
-            <a:spAutoFit/>
-          </a:bodyPr>
-          <a:lstStyle/>
-          <a:p>
-            <a:pPr algn="ctr"/>
-            <a:r>
-              <a:rPr sz="4022" b="1" i="0">
+            <a:off x="640080" y="2052828"/>
+            <a:ext cx="10911535" cy="731520"/>
+          </a:xfrm>
+          <a:prstGeom prst="rect">
+            <a:avLst/>
+          </a:prstGeom>
+          <a:noFill/>
+        </p:spPr>
+        <p:txBody>
+          <a:bodyPr wrap="square">
+            <a:spAutoFit/>
+          </a:bodyPr>
+          <a:lstStyle/>
+          <a:p>
+            <a:pPr algn="ctr"/>
+            <a:r>
+              <a:rPr sz="4300" b="1" i="0">
                 <a:solidFill>
                   <a:srgbClr val="FFFFFF"/>
                 </a:solidFill>
@@ -6119,99 +5244,29 @@
         </p:nvSpPr>
         <p:spPr>
           <a:xfrm>
-            <a:off x="594360" y="2980944"/>
-            <a:ext cx="11002975" cy="347472"/>
-          </a:xfrm>
-          <a:prstGeom prst="rect">
-            <a:avLst/>
-          </a:prstGeom>
-          <a:noFill/>
-        </p:spPr>
-        <p:txBody>
-          <a:bodyPr wrap="square">
-            <a:spAutoFit/>
-          </a:bodyPr>
-          <a:lstStyle/>
-          <a:p>
-            <a:pPr algn="ctr"/>
-            <a:r>
-              <a:rPr sz="2200" b="0" i="1">
-                <a:solidFill>
-                  <a:srgbClr val="8C8C8C"/>
-                </a:solidFill>
-                <a:latin typeface="Arial"/>
-              </a:rPr>
-              <a:t/>
-            </a:r>
-          </a:p>
-        </p:txBody>
-      </p:sp>
-      <p:sp>
-        <p:nvSpPr>
-          <p:cNvPr id="4" name="TextBox 3"/>
-          <p:cNvSpPr txBox="1"/>
-          <p:nvPr/>
-        </p:nvSpPr>
-        <p:spPr>
-          <a:xfrm>
-            <a:off x="594360" y="3529584"/>
-            <a:ext cx="11002975" cy="685800"/>
-          </a:xfrm>
-          <a:prstGeom prst="rect">
-            <a:avLst/>
-          </a:prstGeom>
-          <a:noFill/>
-        </p:spPr>
-        <p:txBody>
-          <a:bodyPr wrap="square">
-            <a:spAutoFit/>
-          </a:bodyPr>
-          <a:lstStyle/>
-          <a:p>
-            <a:pPr algn="ctr"/>
-            <a:r>
-              <a:rPr sz="4400" b="1" i="0">
+            <a:off x="640080" y="2985516"/>
+            <a:ext cx="10911535" cy="731520"/>
+          </a:xfrm>
+          <a:prstGeom prst="rect">
+            <a:avLst/>
+          </a:prstGeom>
+          <a:noFill/>
+        </p:spPr>
+        <p:txBody>
+          <a:bodyPr wrap="square">
+            <a:spAutoFit/>
+          </a:bodyPr>
+          <a:lstStyle/>
+          <a:p>
+            <a:pPr algn="ctr"/>
+            <a:r>
+              <a:rPr sz="4800" b="1" i="0">
                 <a:solidFill>
                   <a:srgbClr val="FFFFFF"/>
                 </a:solidFill>
                 <a:latin typeface="Arial"/>
               </a:rPr>
               <a:t>Tu és Senhor, Tu és Senhor</a:t>
-            </a:r>
-          </a:p>
-        </p:txBody>
-      </p:sp>
-      <p:sp>
-        <p:nvSpPr>
-          <p:cNvPr id="5" name="TextBox 4"/>
-          <p:cNvSpPr txBox="1"/>
-          <p:nvPr/>
-        </p:nvSpPr>
-        <p:spPr>
-          <a:xfrm>
-            <a:off x="594360" y="4251960"/>
-            <a:ext cx="11002975" cy="347472"/>
-          </a:xfrm>
-          <a:prstGeom prst="rect">
-            <a:avLst/>
-          </a:prstGeom>
-          <a:noFill/>
-        </p:spPr>
-        <p:txBody>
-          <a:bodyPr wrap="square">
-            <a:spAutoFit/>
-          </a:bodyPr>
-          <a:lstStyle/>
-          <a:p>
-            <a:pPr algn="ctr"/>
-            <a:r>
-              <a:rPr sz="2200" b="0" i="1">
-                <a:solidFill>
-                  <a:srgbClr val="8C8C8C"/>
-                </a:solidFill>
-                <a:latin typeface="Arial"/>
-              </a:rPr>
-              <a:t/>
             </a:r>
           </a:p>
         </p:txBody>
@@ -6250,23 +5305,23 @@
         </p:nvSpPr>
         <p:spPr>
           <a:xfrm>
-            <a:off x="594360" y="2258568"/>
-            <a:ext cx="11002975" cy="685800"/>
-          </a:xfrm>
-          <a:prstGeom prst="rect">
-            <a:avLst/>
-          </a:prstGeom>
-          <a:noFill/>
-        </p:spPr>
-        <p:txBody>
-          <a:bodyPr wrap="square">
-            <a:spAutoFit/>
-          </a:bodyPr>
-          <a:lstStyle/>
-          <a:p>
-            <a:pPr algn="ctr"/>
-            <a:r>
-              <a:rPr sz="4400" b="1" i="0">
+            <a:off x="640080" y="2052828"/>
+            <a:ext cx="10911535" cy="731520"/>
+          </a:xfrm>
+          <a:prstGeom prst="rect">
+            <a:avLst/>
+          </a:prstGeom>
+          <a:noFill/>
+        </p:spPr>
+        <p:txBody>
+          <a:bodyPr wrap="square">
+            <a:spAutoFit/>
+          </a:bodyPr>
+          <a:lstStyle/>
+          <a:p>
+            <a:pPr algn="ctr"/>
+            <a:r>
+              <a:rPr sz="4800" b="1" i="0">
                 <a:solidFill>
                   <a:srgbClr val="FFFFFF"/>
                 </a:solidFill>
@@ -6285,99 +5340,29 @@
         </p:nvSpPr>
         <p:spPr>
           <a:xfrm>
-            <a:off x="594360" y="2980944"/>
-            <a:ext cx="11002975" cy="347472"/>
-          </a:xfrm>
-          <a:prstGeom prst="rect">
-            <a:avLst/>
-          </a:prstGeom>
-          <a:noFill/>
-        </p:spPr>
-        <p:txBody>
-          <a:bodyPr wrap="square">
-            <a:spAutoFit/>
-          </a:bodyPr>
-          <a:lstStyle/>
-          <a:p>
-            <a:pPr algn="ctr"/>
-            <a:r>
-              <a:rPr sz="2200" b="0" i="1">
-                <a:solidFill>
-                  <a:srgbClr val="8C8C8C"/>
-                </a:solidFill>
-                <a:latin typeface="Arial"/>
-              </a:rPr>
-              <a:t/>
-            </a:r>
-          </a:p>
-        </p:txBody>
-      </p:sp>
-      <p:sp>
-        <p:nvSpPr>
-          <p:cNvPr id="4" name="TextBox 3"/>
-          <p:cNvSpPr txBox="1"/>
-          <p:nvPr/>
-        </p:nvSpPr>
-        <p:spPr>
-          <a:xfrm>
-            <a:off x="594360" y="3529584"/>
-            <a:ext cx="11002975" cy="685800"/>
-          </a:xfrm>
-          <a:prstGeom prst="rect">
-            <a:avLst/>
-          </a:prstGeom>
-          <a:noFill/>
-        </p:spPr>
-        <p:txBody>
-          <a:bodyPr wrap="square">
-            <a:spAutoFit/>
-          </a:bodyPr>
-          <a:lstStyle/>
-          <a:p>
-            <a:pPr algn="ctr"/>
-            <a:r>
-              <a:rPr sz="4400" b="1" i="0">
+            <a:off x="640080" y="2985516"/>
+            <a:ext cx="10911535" cy="731520"/>
+          </a:xfrm>
+          <a:prstGeom prst="rect">
+            <a:avLst/>
+          </a:prstGeom>
+          <a:noFill/>
+        </p:spPr>
+        <p:txBody>
+          <a:bodyPr wrap="square">
+            <a:spAutoFit/>
+          </a:bodyPr>
+          <a:lstStyle/>
+          <a:p>
+            <a:pPr algn="ctr"/>
+            <a:r>
+              <a:rPr sz="4800" b="1" i="0">
                 <a:solidFill>
                   <a:srgbClr val="FFFFFF"/>
                 </a:solidFill>
                 <a:latin typeface="Arial"/>
               </a:rPr>
               <a:t>Tu estás aqui, Tu estás aqui</a:t>
-            </a:r>
-          </a:p>
-        </p:txBody>
-      </p:sp>
-      <p:sp>
-        <p:nvSpPr>
-          <p:cNvPr id="5" name="TextBox 4"/>
-          <p:cNvSpPr txBox="1"/>
-          <p:nvPr/>
-        </p:nvSpPr>
-        <p:spPr>
-          <a:xfrm>
-            <a:off x="594360" y="4251960"/>
-            <a:ext cx="11002975" cy="347472"/>
-          </a:xfrm>
-          <a:prstGeom prst="rect">
-            <a:avLst/>
-          </a:prstGeom>
-          <a:noFill/>
-        </p:spPr>
-        <p:txBody>
-          <a:bodyPr wrap="square">
-            <a:spAutoFit/>
-          </a:bodyPr>
-          <a:lstStyle/>
-          <a:p>
-            <a:pPr algn="ctr"/>
-            <a:r>
-              <a:rPr sz="2200" b="0" i="1">
-                <a:solidFill>
-                  <a:srgbClr val="8C8C8C"/>
-                </a:solidFill>
-                <a:latin typeface="Arial"/>
-              </a:rPr>
-              <a:t/>
             </a:r>
           </a:p>
         </p:txBody>
@@ -6416,23 +5401,23 @@
         </p:nvSpPr>
         <p:spPr>
           <a:xfrm>
-            <a:off x="594360" y="2258568"/>
-            <a:ext cx="11002975" cy="685800"/>
-          </a:xfrm>
-          <a:prstGeom prst="rect">
-            <a:avLst/>
-          </a:prstGeom>
-          <a:noFill/>
-        </p:spPr>
-        <p:txBody>
-          <a:bodyPr wrap="square">
-            <a:spAutoFit/>
-          </a:bodyPr>
-          <a:lstStyle/>
-          <a:p>
-            <a:pPr algn="ctr"/>
-            <a:r>
-              <a:rPr sz="4400" b="1" i="0">
+            <a:off x="640080" y="2052828"/>
+            <a:ext cx="10911535" cy="731520"/>
+          </a:xfrm>
+          <a:prstGeom prst="rect">
+            <a:avLst/>
+          </a:prstGeom>
+          <a:noFill/>
+        </p:spPr>
+        <p:txBody>
+          <a:bodyPr wrap="square">
+            <a:spAutoFit/>
+          </a:bodyPr>
+          <a:lstStyle/>
+          <a:p>
+            <a:pPr algn="ctr"/>
+            <a:r>
+              <a:rPr sz="4800" b="1" i="0">
                 <a:solidFill>
                   <a:srgbClr val="FFFFFF"/>
                 </a:solidFill>
@@ -6451,99 +5436,29 @@
         </p:nvSpPr>
         <p:spPr>
           <a:xfrm>
-            <a:off x="594360" y="2980944"/>
-            <a:ext cx="11002975" cy="347472"/>
-          </a:xfrm>
-          <a:prstGeom prst="rect">
-            <a:avLst/>
-          </a:prstGeom>
-          <a:noFill/>
-        </p:spPr>
-        <p:txBody>
-          <a:bodyPr wrap="square">
-            <a:spAutoFit/>
-          </a:bodyPr>
-          <a:lstStyle/>
-          <a:p>
-            <a:pPr algn="ctr"/>
-            <a:r>
-              <a:rPr sz="2200" b="0" i="1">
-                <a:solidFill>
-                  <a:srgbClr val="8C8C8C"/>
-                </a:solidFill>
-                <a:latin typeface="Arial"/>
-              </a:rPr>
-              <a:t/>
-            </a:r>
-          </a:p>
-        </p:txBody>
-      </p:sp>
-      <p:sp>
-        <p:nvSpPr>
-          <p:cNvPr id="4" name="TextBox 3"/>
-          <p:cNvSpPr txBox="1"/>
-          <p:nvPr/>
-        </p:nvSpPr>
-        <p:spPr>
-          <a:xfrm>
-            <a:off x="594360" y="3529584"/>
-            <a:ext cx="11002975" cy="685800"/>
-          </a:xfrm>
-          <a:prstGeom prst="rect">
-            <a:avLst/>
-          </a:prstGeom>
-          <a:noFill/>
-        </p:spPr>
-        <p:txBody>
-          <a:bodyPr wrap="square">
-            <a:spAutoFit/>
-          </a:bodyPr>
-          <a:lstStyle/>
-          <a:p>
-            <a:pPr algn="ctr"/>
-            <a:r>
-              <a:rPr sz="4400" b="1" i="0">
+            <a:off x="640080" y="2985516"/>
+            <a:ext cx="10911535" cy="731520"/>
+          </a:xfrm>
+          <a:prstGeom prst="rect">
+            <a:avLst/>
+          </a:prstGeom>
+          <a:noFill/>
+        </p:spPr>
+        <p:txBody>
+          <a:bodyPr wrap="square">
+            <a:spAutoFit/>
+          </a:bodyPr>
+          <a:lstStyle/>
+          <a:p>
+            <a:pPr algn="ctr"/>
+            <a:r>
+              <a:rPr sz="4800" b="1" i="0">
                 <a:solidFill>
                   <a:srgbClr val="FFFFFF"/>
                 </a:solidFill>
                 <a:latin typeface="Arial"/>
               </a:rPr>
               <a:t>Tu és Deus, Tu és Deus</a:t>
-            </a:r>
-          </a:p>
-        </p:txBody>
-      </p:sp>
-      <p:sp>
-        <p:nvSpPr>
-          <p:cNvPr id="5" name="TextBox 4"/>
-          <p:cNvSpPr txBox="1"/>
-          <p:nvPr/>
-        </p:nvSpPr>
-        <p:spPr>
-          <a:xfrm>
-            <a:off x="594360" y="4251960"/>
-            <a:ext cx="11002975" cy="347472"/>
-          </a:xfrm>
-          <a:prstGeom prst="rect">
-            <a:avLst/>
-          </a:prstGeom>
-          <a:noFill/>
-        </p:spPr>
-        <p:txBody>
-          <a:bodyPr wrap="square">
-            <a:spAutoFit/>
-          </a:bodyPr>
-          <a:lstStyle/>
-          <a:p>
-            <a:pPr algn="ctr"/>
-            <a:r>
-              <a:rPr sz="2200" b="0" i="1">
-                <a:solidFill>
-                  <a:srgbClr val="8C8C8C"/>
-                </a:solidFill>
-                <a:latin typeface="Arial"/>
-              </a:rPr>
-              <a:t/>
             </a:r>
           </a:p>
         </p:txBody>
@@ -6582,64 +5497,29 @@
         </p:nvSpPr>
         <p:spPr>
           <a:xfrm>
-            <a:off x="594360" y="2894076"/>
-            <a:ext cx="11002975" cy="685800"/>
-          </a:xfrm>
-          <a:prstGeom prst="rect">
-            <a:avLst/>
-          </a:prstGeom>
-          <a:noFill/>
-        </p:spPr>
-        <p:txBody>
-          <a:bodyPr wrap="square">
-            <a:spAutoFit/>
-          </a:bodyPr>
-          <a:lstStyle/>
-          <a:p>
-            <a:pPr algn="ctr"/>
-            <a:r>
-              <a:rPr sz="3911" b="1" i="0">
+            <a:off x="640080" y="2702052"/>
+            <a:ext cx="10911535" cy="731520"/>
+          </a:xfrm>
+          <a:prstGeom prst="rect">
+            <a:avLst/>
+          </a:prstGeom>
+          <a:noFill/>
+        </p:spPr>
+        <p:txBody>
+          <a:bodyPr wrap="square">
+            <a:spAutoFit/>
+          </a:bodyPr>
+          <a:lstStyle/>
+          <a:p>
+            <a:pPr algn="ctr"/>
+            <a:r>
+              <a:rPr sz="4200" b="1" i="0">
                 <a:solidFill>
                   <a:srgbClr val="FFFFFF"/>
                 </a:solidFill>
                 <a:latin typeface="Arial"/>
               </a:rPr>
               <a:t>Tu és a esperança, Tu és a esperança</a:t>
-            </a:r>
-          </a:p>
-        </p:txBody>
-      </p:sp>
-      <p:sp>
-        <p:nvSpPr>
-          <p:cNvPr id="3" name="TextBox 2"/>
-          <p:cNvSpPr txBox="1"/>
-          <p:nvPr/>
-        </p:nvSpPr>
-        <p:spPr>
-          <a:xfrm>
-            <a:off x="594360" y="3616452"/>
-            <a:ext cx="11002975" cy="347472"/>
-          </a:xfrm>
-          <a:prstGeom prst="rect">
-            <a:avLst/>
-          </a:prstGeom>
-          <a:noFill/>
-        </p:spPr>
-        <p:txBody>
-          <a:bodyPr wrap="square">
-            <a:spAutoFit/>
-          </a:bodyPr>
-          <a:lstStyle/>
-          <a:p>
-            <a:pPr algn="ctr"/>
-            <a:r>
-              <a:rPr sz="2200" b="0" i="1">
-                <a:solidFill>
-                  <a:srgbClr val="8C8C8C"/>
-                </a:solidFill>
-                <a:latin typeface="Arial"/>
-              </a:rPr>
-              <a:t/>
             </a:r>
           </a:p>
         </p:txBody>
@@ -6678,23 +5558,23 @@
         </p:nvSpPr>
         <p:spPr>
           <a:xfrm>
-            <a:off x="594360" y="1837944"/>
-            <a:ext cx="11002975" cy="685800"/>
-          </a:xfrm>
-          <a:prstGeom prst="rect">
-            <a:avLst/>
-          </a:prstGeom>
-          <a:noFill/>
-        </p:spPr>
-        <p:txBody>
-          <a:bodyPr wrap="square">
-            <a:spAutoFit/>
-          </a:bodyPr>
-          <a:lstStyle/>
-          <a:p>
-            <a:pPr algn="ctr"/>
-            <a:r>
-              <a:rPr sz="4400" b="1" i="0">
+            <a:off x="640080" y="1650492"/>
+            <a:ext cx="10911535" cy="731520"/>
+          </a:xfrm>
+          <a:prstGeom prst="rect">
+            <a:avLst/>
+          </a:prstGeom>
+          <a:noFill/>
+        </p:spPr>
+        <p:txBody>
+          <a:bodyPr wrap="square">
+            <a:spAutoFit/>
+          </a:bodyPr>
+          <a:lstStyle/>
+          <a:p>
+            <a:pPr algn="ctr"/>
+            <a:r>
+              <a:rPr sz="4800" b="1" i="0">
                 <a:solidFill>
                   <a:srgbClr val="FFFFFF"/>
                 </a:solidFill>
@@ -6713,8 +5593,8 @@
         </p:nvSpPr>
         <p:spPr>
           <a:xfrm>
-            <a:off x="594360" y="2560320"/>
-            <a:ext cx="11002975" cy="384048"/>
+            <a:off x="640080" y="2418588"/>
+            <a:ext cx="10911535" cy="365760"/>
           </a:xfrm>
           <a:prstGeom prst="rect">
             <a:avLst/>
@@ -6731,7 +5611,7 @@
             <a:r>
               <a:rPr sz="2400" b="0" i="1">
                 <a:solidFill>
-                  <a:srgbClr val="B4B4B4"/>
+                  <a:srgbClr val="AAAAAA"/>
                 </a:solidFill>
                 <a:latin typeface="Arial"/>
               </a:rPr>
@@ -6748,8 +5628,78 @@
         </p:nvSpPr>
         <p:spPr>
           <a:xfrm>
-            <a:off x="594360" y="2980944"/>
-            <a:ext cx="11002975" cy="347472"/>
+            <a:off x="640080" y="2985516"/>
+            <a:ext cx="10911535" cy="731520"/>
+          </a:xfrm>
+          <a:prstGeom prst="rect">
+            <a:avLst/>
+          </a:prstGeom>
+          <a:noFill/>
+        </p:spPr>
+        <p:txBody>
+          <a:bodyPr wrap="square">
+            <a:spAutoFit/>
+          </a:bodyPr>
+          <a:lstStyle/>
+          <a:p>
+            <a:pPr algn="ctr"/>
+            <a:r>
+              <a:rPr sz="4800" b="1" i="0">
+                <a:solidFill>
+                  <a:srgbClr val="FFFFFF"/>
+                </a:solidFill>
+                <a:latin typeface="Arial"/>
+              </a:rPr>
+              <a:t>真実見せる         疑うときも</a:t>
+            </a:r>
+          </a:p>
+        </p:txBody>
+      </p:sp>
+      <p:sp>
+        <p:nvSpPr>
+          <p:cNvPr id="5" name="TextBox 4"/>
+          <p:cNvSpPr txBox="1"/>
+          <p:nvPr/>
+        </p:nvSpPr>
+        <p:spPr>
+          <a:xfrm>
+            <a:off x="640080" y="3753612"/>
+            <a:ext cx="10911535" cy="365760"/>
+          </a:xfrm>
+          <a:prstGeom prst="rect">
+            <a:avLst/>
+          </a:prstGeom>
+          <a:noFill/>
+        </p:spPr>
+        <p:txBody>
+          <a:bodyPr wrap="square">
+            <a:spAutoFit/>
+          </a:bodyPr>
+          <a:lstStyle/>
+          <a:p>
+            <a:pPr algn="ctr"/>
+            <a:r>
+              <a:rPr sz="2400" b="0" i="1">
+                <a:solidFill>
+                  <a:srgbClr val="AAAAAA"/>
+                </a:solidFill>
+                <a:latin typeface="Arial"/>
+              </a:rPr>
+              <a:t>shinjitsu miseru  utagau toki mo</a:t>
+            </a:r>
+          </a:p>
+        </p:txBody>
+      </p:sp>
+      <p:sp>
+        <p:nvSpPr>
+          <p:cNvPr id="6" name="TextBox 5"/>
+          <p:cNvSpPr txBox="1"/>
+          <p:nvPr/>
+        </p:nvSpPr>
+        <p:spPr>
+          <a:xfrm>
+            <a:off x="640080" y="4530852"/>
+            <a:ext cx="10911535" cy="310896"/>
           </a:xfrm>
           <a:prstGeom prst="rect">
             <a:avLst/>
@@ -6766,81 +5716,11 @@
             <a:r>
               <a:rPr sz="2000" b="0" i="1">
                 <a:solidFill>
-                  <a:srgbClr val="8C8C8C"/>
-                </a:solidFill>
-                <a:latin typeface="Arial"/>
-              </a:rPr>
-              <a:t/>
-            </a:r>
-          </a:p>
-        </p:txBody>
-      </p:sp>
-      <p:sp>
-        <p:nvSpPr>
-          <p:cNvPr id="5" name="TextBox 4"/>
-          <p:cNvSpPr txBox="1"/>
-          <p:nvPr/>
-        </p:nvSpPr>
-        <p:spPr>
-          <a:xfrm>
-            <a:off x="594360" y="3529584"/>
-            <a:ext cx="11002975" cy="685800"/>
-          </a:xfrm>
-          <a:prstGeom prst="rect">
-            <a:avLst/>
-          </a:prstGeom>
-          <a:noFill/>
-        </p:spPr>
-        <p:txBody>
-          <a:bodyPr wrap="square">
-            <a:spAutoFit/>
-          </a:bodyPr>
-          <a:lstStyle/>
-          <a:p>
-            <a:pPr algn="ctr"/>
-            <a:r>
-              <a:rPr sz="4400" b="1" i="0">
-                <a:solidFill>
-                  <a:srgbClr val="FFFFFF"/>
-                </a:solidFill>
-                <a:latin typeface="Arial"/>
-              </a:rPr>
-              <a:t>真実見せる         疑うときも</a:t>
-            </a:r>
-          </a:p>
-        </p:txBody>
-      </p:sp>
-      <p:sp>
-        <p:nvSpPr>
-          <p:cNvPr id="6" name="TextBox 5"/>
-          <p:cNvSpPr txBox="1"/>
-          <p:nvPr/>
-        </p:nvSpPr>
-        <p:spPr>
-          <a:xfrm>
-            <a:off x="594360" y="4251960"/>
-            <a:ext cx="11002975" cy="384048"/>
-          </a:xfrm>
-          <a:prstGeom prst="rect">
-            <a:avLst/>
-          </a:prstGeom>
-          <a:noFill/>
-        </p:spPr>
-        <p:txBody>
-          <a:bodyPr wrap="square">
-            <a:spAutoFit/>
-          </a:bodyPr>
-          <a:lstStyle/>
-          <a:p>
-            <a:pPr algn="ctr"/>
-            <a:r>
-              <a:rPr sz="2400" b="0" i="1">
-                <a:solidFill>
-                  <a:srgbClr val="B4B4B4"/>
-                </a:solidFill>
-                <a:latin typeface="Arial"/>
-              </a:rPr>
-              <a:t>shinjitsu miseru  utagau toki mo</a:t>
+                  <a:srgbClr val="828282"/>
+                </a:solidFill>
+                <a:latin typeface="Arial"/>
+              </a:rPr>
+              <a:t>Sempre Reina</a:t>
             </a:r>
           </a:p>
         </p:txBody>
@@ -6853,8 +5733,8 @@
         </p:nvSpPr>
         <p:spPr>
           <a:xfrm>
-            <a:off x="594360" y="4672584"/>
-            <a:ext cx="11002975" cy="347472"/>
+            <a:off x="640080" y="4896612"/>
+            <a:ext cx="10911535" cy="310896"/>
           </a:xfrm>
           <a:prstGeom prst="rect">
             <a:avLst/>
@@ -6871,11 +5751,11 @@
             <a:r>
               <a:rPr sz="2000" b="0" i="1">
                 <a:solidFill>
-                  <a:srgbClr val="8C8C8C"/>
-                </a:solidFill>
-                <a:latin typeface="Arial"/>
-              </a:rPr>
-              <a:t/>
+                  <a:srgbClr val="828282"/>
+                </a:solidFill>
+                <a:latin typeface="Arial"/>
+              </a:rPr>
+              <a:t>Quando não há nada de bom em mim</a:t>
             </a:r>
           </a:p>
         </p:txBody>
@@ -6914,23 +5794,23 @@
         </p:nvSpPr>
         <p:spPr>
           <a:xfrm>
-            <a:off x="594360" y="1837944"/>
-            <a:ext cx="11002975" cy="685800"/>
-          </a:xfrm>
-          <a:prstGeom prst="rect">
-            <a:avLst/>
-          </a:prstGeom>
-          <a:noFill/>
-        </p:spPr>
-        <p:txBody>
-          <a:bodyPr wrap="square">
-            <a:spAutoFit/>
-          </a:bodyPr>
-          <a:lstStyle/>
-          <a:p>
-            <a:pPr algn="ctr"/>
-            <a:r>
-              <a:rPr sz="4400" b="1" i="0">
+            <a:off x="640080" y="1650492"/>
+            <a:ext cx="10911535" cy="731520"/>
+          </a:xfrm>
+          <a:prstGeom prst="rect">
+            <a:avLst/>
+          </a:prstGeom>
+          <a:noFill/>
+        </p:spPr>
+        <p:txBody>
+          <a:bodyPr wrap="square">
+            <a:spAutoFit/>
+          </a:bodyPr>
+          <a:lstStyle/>
+          <a:p>
+            <a:pPr algn="ctr"/>
+            <a:r>
+              <a:rPr sz="4800" b="1" i="0">
                 <a:solidFill>
                   <a:srgbClr val="FFFFFF"/>
                 </a:solidFill>
@@ -6949,8 +5829,8 @@
         </p:nvSpPr>
         <p:spPr>
           <a:xfrm>
-            <a:off x="594360" y="2560320"/>
-            <a:ext cx="11002975" cy="384048"/>
+            <a:off x="640080" y="2418588"/>
+            <a:ext cx="10911535" cy="365760"/>
           </a:xfrm>
           <a:prstGeom prst="rect">
             <a:avLst/>
@@ -6967,7 +5847,7 @@
             <a:r>
               <a:rPr sz="2400" b="0" i="1">
                 <a:solidFill>
-                  <a:srgbClr val="B4B4B4"/>
+                  <a:srgbClr val="AAAAAA"/>
                 </a:solidFill>
                 <a:latin typeface="Arial"/>
               </a:rPr>
@@ -6984,8 +5864,78 @@
         </p:nvSpPr>
         <p:spPr>
           <a:xfrm>
-            <a:off x="594360" y="2980944"/>
-            <a:ext cx="11002975" cy="347472"/>
+            <a:off x="640080" y="2985516"/>
+            <a:ext cx="10911535" cy="731520"/>
+          </a:xfrm>
+          <a:prstGeom prst="rect">
+            <a:avLst/>
+          </a:prstGeom>
+          <a:noFill/>
+        </p:spPr>
+        <p:txBody>
+          <a:bodyPr wrap="square">
+            <a:spAutoFit/>
+          </a:bodyPr>
+          <a:lstStyle/>
+          <a:p>
+            <a:pPr algn="ctr"/>
+            <a:r>
+              <a:rPr sz="4800" b="1" i="0">
+                <a:solidFill>
+                  <a:srgbClr val="FFFFFF"/>
+                </a:solidFill>
+                <a:latin typeface="Arial"/>
+              </a:rPr>
+              <a:t>死さえ失せる   あなたが命</a:t>
+            </a:r>
+          </a:p>
+        </p:txBody>
+      </p:sp>
+      <p:sp>
+        <p:nvSpPr>
+          <p:cNvPr id="5" name="TextBox 4"/>
+          <p:cNvSpPr txBox="1"/>
+          <p:nvPr/>
+        </p:nvSpPr>
+        <p:spPr>
+          <a:xfrm>
+            <a:off x="640080" y="3753612"/>
+            <a:ext cx="10911535" cy="365760"/>
+          </a:xfrm>
+          <a:prstGeom prst="rect">
+            <a:avLst/>
+          </a:prstGeom>
+          <a:noFill/>
+        </p:spPr>
+        <p:txBody>
+          <a:bodyPr wrap="square">
+            <a:spAutoFit/>
+          </a:bodyPr>
+          <a:lstStyle/>
+          <a:p>
+            <a:pPr algn="ctr"/>
+            <a:r>
+              <a:rPr sz="2400" b="0" i="1">
+                <a:solidFill>
+                  <a:srgbClr val="AAAAAA"/>
+                </a:solidFill>
+                <a:latin typeface="Arial"/>
+              </a:rPr>
+              <a:t>shisae useru   anata ga inochi</a:t>
+            </a:r>
+          </a:p>
+        </p:txBody>
+      </p:sp>
+      <p:sp>
+        <p:nvSpPr>
+          <p:cNvPr id="6" name="TextBox 5"/>
+          <p:cNvSpPr txBox="1"/>
+          <p:nvPr/>
+        </p:nvSpPr>
+        <p:spPr>
+          <a:xfrm>
+            <a:off x="640080" y="4530852"/>
+            <a:ext cx="10911535" cy="310896"/>
           </a:xfrm>
           <a:prstGeom prst="rect">
             <a:avLst/>
@@ -7002,81 +5952,11 @@
             <a:r>
               <a:rPr sz="2000" b="0" i="1">
                 <a:solidFill>
-                  <a:srgbClr val="8C8C8C"/>
-                </a:solidFill>
-                <a:latin typeface="Arial"/>
-              </a:rPr>
-              <a:t/>
-            </a:r>
-          </a:p>
-        </p:txBody>
-      </p:sp>
-      <p:sp>
-        <p:nvSpPr>
-          <p:cNvPr id="5" name="TextBox 4"/>
-          <p:cNvSpPr txBox="1"/>
-          <p:nvPr/>
-        </p:nvSpPr>
-        <p:spPr>
-          <a:xfrm>
-            <a:off x="594360" y="3529584"/>
-            <a:ext cx="11002975" cy="685800"/>
-          </a:xfrm>
-          <a:prstGeom prst="rect">
-            <a:avLst/>
-          </a:prstGeom>
-          <a:noFill/>
-        </p:spPr>
-        <p:txBody>
-          <a:bodyPr wrap="square">
-            <a:spAutoFit/>
-          </a:bodyPr>
-          <a:lstStyle/>
-          <a:p>
-            <a:pPr algn="ctr"/>
-            <a:r>
-              <a:rPr sz="4400" b="1" i="0">
-                <a:solidFill>
-                  <a:srgbClr val="FFFFFF"/>
-                </a:solidFill>
-                <a:latin typeface="Arial"/>
-              </a:rPr>
-              <a:t>死さえ失せる   あなたが命</a:t>
-            </a:r>
-          </a:p>
-        </p:txBody>
-      </p:sp>
-      <p:sp>
-        <p:nvSpPr>
-          <p:cNvPr id="6" name="TextBox 5"/>
-          <p:cNvSpPr txBox="1"/>
-          <p:nvPr/>
-        </p:nvSpPr>
-        <p:spPr>
-          <a:xfrm>
-            <a:off x="594360" y="4251960"/>
-            <a:ext cx="11002975" cy="384048"/>
-          </a:xfrm>
-          <a:prstGeom prst="rect">
-            <a:avLst/>
-          </a:prstGeom>
-          <a:noFill/>
-        </p:spPr>
-        <p:txBody>
-          <a:bodyPr wrap="square">
-            <a:spAutoFit/>
-          </a:bodyPr>
-          <a:lstStyle/>
-          <a:p>
-            <a:pPr algn="ctr"/>
-            <a:r>
-              <a:rPr sz="2400" b="0" i="1">
-                <a:solidFill>
-                  <a:srgbClr val="B4B4B4"/>
-                </a:solidFill>
-                <a:latin typeface="Arial"/>
-              </a:rPr>
-              <a:t>shisae useru   anata ga inochi</a:t>
+                  <a:srgbClr val="828282"/>
+                </a:solidFill>
+                <a:latin typeface="Arial"/>
+              </a:rPr>
+              <a:t>Em exposição para todos verem</a:t>
             </a:r>
           </a:p>
         </p:txBody>
@@ -7089,8 +5969,8 @@
         </p:nvSpPr>
         <p:spPr>
           <a:xfrm>
-            <a:off x="594360" y="4672584"/>
-            <a:ext cx="11002975" cy="347472"/>
+            <a:off x="640080" y="4896612"/>
+            <a:ext cx="10911535" cy="310896"/>
           </a:xfrm>
           <a:prstGeom prst="rect">
             <a:avLst/>
@@ -7107,11 +5987,11 @@
             <a:r>
               <a:rPr sz="2000" b="0" i="1">
                 <a:solidFill>
-                  <a:srgbClr val="8C8C8C"/>
-                </a:solidFill>
-                <a:latin typeface="Arial"/>
-              </a:rPr>
-              <a:t/>
+                  <a:srgbClr val="828282"/>
+                </a:solidFill>
+                <a:latin typeface="Arial"/>
+              </a:rPr>
+              <a:t>Quando as trevas se aproximam</a:t>
             </a:r>
           </a:p>
         </p:txBody>
@@ -7150,23 +6030,23 @@
         </p:nvSpPr>
         <p:spPr>
           <a:xfrm>
-            <a:off x="594360" y="1837944"/>
-            <a:ext cx="11002975" cy="685800"/>
-          </a:xfrm>
-          <a:prstGeom prst="rect">
-            <a:avLst/>
-          </a:prstGeom>
-          <a:noFill/>
-        </p:spPr>
-        <p:txBody>
-          <a:bodyPr wrap="square">
-            <a:spAutoFit/>
-          </a:bodyPr>
-          <a:lstStyle/>
-          <a:p>
-            <a:pPr algn="ctr"/>
-            <a:r>
-              <a:rPr sz="4400" b="1" i="0">
+            <a:off x="640080" y="1650492"/>
+            <a:ext cx="10911535" cy="731520"/>
+          </a:xfrm>
+          <a:prstGeom prst="rect">
+            <a:avLst/>
+          </a:prstGeom>
+          <a:noFill/>
+        </p:spPr>
+        <p:txBody>
+          <a:bodyPr wrap="square">
+            <a:spAutoFit/>
+          </a:bodyPr>
+          <a:lstStyle/>
+          <a:p>
+            <a:pPr algn="ctr"/>
+            <a:r>
+              <a:rPr sz="4800" b="1" i="0">
                 <a:solidFill>
                   <a:srgbClr val="FFFFFF"/>
                 </a:solidFill>
@@ -7185,8 +6065,8 @@
         </p:nvSpPr>
         <p:spPr>
           <a:xfrm>
-            <a:off x="594360" y="2560320"/>
-            <a:ext cx="11002975" cy="384048"/>
+            <a:off x="640080" y="2418588"/>
+            <a:ext cx="10911535" cy="365760"/>
           </a:xfrm>
           <a:prstGeom prst="rect">
             <a:avLst/>
@@ -7203,7 +6083,7 @@
             <a:r>
               <a:rPr sz="2400" b="0" i="1">
                 <a:solidFill>
-                  <a:srgbClr val="B4B4B4"/>
+                  <a:srgbClr val="AAAAAA"/>
                 </a:solidFill>
                 <a:latin typeface="Arial"/>
               </a:rPr>
@@ -7220,8 +6100,78 @@
         </p:nvSpPr>
         <p:spPr>
           <a:xfrm>
-            <a:off x="594360" y="2980944"/>
-            <a:ext cx="11002975" cy="347472"/>
+            <a:off x="640080" y="2985516"/>
+            <a:ext cx="10911535" cy="731520"/>
+          </a:xfrm>
+          <a:prstGeom prst="rect">
+            <a:avLst/>
+          </a:prstGeom>
+          <a:noFill/>
+        </p:spPr>
+        <p:txBody>
+          <a:bodyPr wrap="square">
+            <a:spAutoFit/>
+          </a:bodyPr>
+          <a:lstStyle/>
+          <a:p>
+            <a:pPr algn="ctr"/>
+            <a:r>
+              <a:rPr sz="4800" b="1" i="0">
+                <a:solidFill>
+                  <a:srgbClr val="FFFFFF"/>
+                </a:solidFill>
+                <a:latin typeface="Arial"/>
+              </a:rPr>
+              <a:t>愛にみちた    永遠の手</a:t>
+            </a:r>
+          </a:p>
+        </p:txBody>
+      </p:sp>
+      <p:sp>
+        <p:nvSpPr>
+          <p:cNvPr id="5" name="TextBox 4"/>
+          <p:cNvSpPr txBox="1"/>
+          <p:nvPr/>
+        </p:nvSpPr>
+        <p:spPr>
+          <a:xfrm>
+            <a:off x="640080" y="3753612"/>
+            <a:ext cx="10911535" cy="365760"/>
+          </a:xfrm>
+          <a:prstGeom prst="rect">
+            <a:avLst/>
+          </a:prstGeom>
+          <a:noFill/>
+        </p:spPr>
+        <p:txBody>
+          <a:bodyPr wrap="square">
+            <a:spAutoFit/>
+          </a:bodyPr>
+          <a:lstStyle/>
+          <a:p>
+            <a:pPr algn="ctr"/>
+            <a:r>
+              <a:rPr sz="2400" b="0" i="1">
+                <a:solidFill>
+                  <a:srgbClr val="AAAAAA"/>
+                </a:solidFill>
+                <a:latin typeface="Arial"/>
+              </a:rPr>
+              <a:t>ai ni michita  eien no te</a:t>
+            </a:r>
+          </a:p>
+        </p:txBody>
+      </p:sp>
+      <p:sp>
+        <p:nvSpPr>
+          <p:cNvPr id="6" name="TextBox 5"/>
+          <p:cNvSpPr txBox="1"/>
+          <p:nvPr/>
+        </p:nvSpPr>
+        <p:spPr>
+          <a:xfrm>
+            <a:off x="640080" y="4530852"/>
+            <a:ext cx="10911535" cy="310896"/>
           </a:xfrm>
           <a:prstGeom prst="rect">
             <a:avLst/>
@@ -7238,7 +6188,7 @@
             <a:r>
               <a:rPr sz="2000" b="0" i="1">
                 <a:solidFill>
-                  <a:srgbClr val="8C8C8C"/>
+                  <a:srgbClr val="828282"/>
                 </a:solidFill>
                 <a:latin typeface="Arial"/>
               </a:rPr>
@@ -7249,84 +6199,14 @@
       </p:sp>
       <p:sp>
         <p:nvSpPr>
-          <p:cNvPr id="5" name="TextBox 4"/>
-          <p:cNvSpPr txBox="1"/>
-          <p:nvPr/>
-        </p:nvSpPr>
-        <p:spPr>
-          <a:xfrm>
-            <a:off x="594360" y="3529584"/>
-            <a:ext cx="11002975" cy="685800"/>
-          </a:xfrm>
-          <a:prstGeom prst="rect">
-            <a:avLst/>
-          </a:prstGeom>
-          <a:noFill/>
-        </p:spPr>
-        <p:txBody>
-          <a:bodyPr wrap="square">
-            <a:spAutoFit/>
-          </a:bodyPr>
-          <a:lstStyle/>
-          <a:p>
-            <a:pPr algn="ctr"/>
-            <a:r>
-              <a:rPr sz="4400" b="1" i="0">
-                <a:solidFill>
-                  <a:srgbClr val="FFFFFF"/>
-                </a:solidFill>
-                <a:latin typeface="Arial"/>
-              </a:rPr>
-              <a:t>愛にみちた    永遠の手</a:t>
-            </a:r>
-          </a:p>
-        </p:txBody>
-      </p:sp>
-      <p:sp>
-        <p:nvSpPr>
-          <p:cNvPr id="6" name="TextBox 5"/>
-          <p:cNvSpPr txBox="1"/>
-          <p:nvPr/>
-        </p:nvSpPr>
-        <p:spPr>
-          <a:xfrm>
-            <a:off x="594360" y="4251960"/>
-            <a:ext cx="11002975" cy="384048"/>
-          </a:xfrm>
-          <a:prstGeom prst="rect">
-            <a:avLst/>
-          </a:prstGeom>
-          <a:noFill/>
-        </p:spPr>
-        <p:txBody>
-          <a:bodyPr wrap="square">
-            <a:spAutoFit/>
-          </a:bodyPr>
-          <a:lstStyle/>
-          <a:p>
-            <a:pPr algn="ctr"/>
-            <a:r>
-              <a:rPr sz="2400" b="0" i="1">
-                <a:solidFill>
-                  <a:srgbClr val="B4B4B4"/>
-                </a:solidFill>
-                <a:latin typeface="Arial"/>
-              </a:rPr>
-              <a:t>ai ni michita  eien no te</a:t>
-            </a:r>
-          </a:p>
-        </p:txBody>
-      </p:sp>
-      <p:sp>
-        <p:nvSpPr>
           <p:cNvPr id="7" name="TextBox 6"/>
           <p:cNvSpPr txBox="1"/>
           <p:nvPr/>
         </p:nvSpPr>
         <p:spPr>
           <a:xfrm>
-            <a:off x="594360" y="4672584"/>
-            <a:ext cx="11002975" cy="347472"/>
+            <a:off x="640080" y="4896612"/>
+            <a:ext cx="10911535" cy="310896"/>
           </a:xfrm>
           <a:prstGeom prst="rect">
             <a:avLst/>
@@ -7343,7 +6223,7 @@
             <a:r>
               <a:rPr sz="2000" b="0" i="1">
                 <a:solidFill>
-                  <a:srgbClr val="8C8C8C"/>
+                  <a:srgbClr val="828282"/>
                 </a:solidFill>
                 <a:latin typeface="Arial"/>
               </a:rPr>
@@ -7386,23 +6266,23 @@
         </p:nvSpPr>
         <p:spPr>
           <a:xfrm>
-            <a:off x="594360" y="2683764"/>
-            <a:ext cx="11002975" cy="685800"/>
-          </a:xfrm>
-          <a:prstGeom prst="rect">
-            <a:avLst/>
-          </a:prstGeom>
-          <a:noFill/>
-        </p:spPr>
-        <p:txBody>
-          <a:bodyPr wrap="square">
-            <a:spAutoFit/>
-          </a:bodyPr>
-          <a:lstStyle/>
-          <a:p>
-            <a:pPr algn="ctr"/>
-            <a:r>
-              <a:rPr sz="4400" b="1" i="0">
+            <a:off x="640080" y="2500884"/>
+            <a:ext cx="10911535" cy="731520"/>
+          </a:xfrm>
+          <a:prstGeom prst="rect">
+            <a:avLst/>
+          </a:prstGeom>
+          <a:noFill/>
+        </p:spPr>
+        <p:txBody>
+          <a:bodyPr wrap="square">
+            <a:spAutoFit/>
+          </a:bodyPr>
+          <a:lstStyle/>
+          <a:p>
+            <a:pPr algn="ctr"/>
+            <a:r>
+              <a:rPr sz="4800" b="1" i="0">
                 <a:solidFill>
                   <a:srgbClr val="FFFFFF"/>
                 </a:solidFill>
@@ -7421,8 +6301,8 @@
         </p:nvSpPr>
         <p:spPr>
           <a:xfrm>
-            <a:off x="594360" y="3406140"/>
-            <a:ext cx="11002975" cy="384048"/>
+            <a:off x="640080" y="3268980"/>
+            <a:ext cx="10911535" cy="365760"/>
           </a:xfrm>
           <a:prstGeom prst="rect">
             <a:avLst/>
@@ -7439,7 +6319,7 @@
             <a:r>
               <a:rPr sz="2400" b="0" i="1">
                 <a:solidFill>
-                  <a:srgbClr val="B4B4B4"/>
+                  <a:srgbClr val="AAAAAA"/>
                 </a:solidFill>
                 <a:latin typeface="Arial"/>
               </a:rPr>
@@ -7456,8 +6336,8 @@
         </p:nvSpPr>
         <p:spPr>
           <a:xfrm>
-            <a:off x="594360" y="3826764"/>
-            <a:ext cx="11002975" cy="347472"/>
+            <a:off x="640080" y="4046220"/>
+            <a:ext cx="10911535" cy="310896"/>
           </a:xfrm>
           <a:prstGeom prst="rect">
             <a:avLst/>
@@ -7474,7 +6354,7 @@
             <a:r>
               <a:rPr sz="2000" b="0" i="1">
                 <a:solidFill>
-                  <a:srgbClr val="8C8C8C"/>
+                  <a:srgbClr val="828282"/>
                 </a:solidFill>
                 <a:latin typeface="Arial"/>
               </a:rPr>
@@ -7517,23 +6397,23 @@
         </p:nvSpPr>
         <p:spPr>
           <a:xfrm>
-            <a:off x="594360" y="2258568"/>
-            <a:ext cx="11002975" cy="685800"/>
-          </a:xfrm>
-          <a:prstGeom prst="rect">
-            <a:avLst/>
-          </a:prstGeom>
-          <a:noFill/>
-        </p:spPr>
-        <p:txBody>
-          <a:bodyPr wrap="square">
-            <a:spAutoFit/>
-          </a:bodyPr>
-          <a:lstStyle/>
-          <a:p>
-            <a:pPr algn="ctr"/>
-            <a:r>
-              <a:rPr sz="4400" b="1" i="0">
+            <a:off x="640080" y="2052828"/>
+            <a:ext cx="10911535" cy="731520"/>
+          </a:xfrm>
+          <a:prstGeom prst="rect">
+            <a:avLst/>
+          </a:prstGeom>
+          <a:noFill/>
+        </p:spPr>
+        <p:txBody>
+          <a:bodyPr wrap="square">
+            <a:spAutoFit/>
+          </a:bodyPr>
+          <a:lstStyle/>
+          <a:p>
+            <a:pPr algn="ctr"/>
+            <a:r>
+              <a:rPr sz="4800" b="1" i="0">
                 <a:solidFill>
                   <a:srgbClr val="FFFFFF"/>
                 </a:solidFill>
@@ -7552,99 +6432,29 @@
         </p:nvSpPr>
         <p:spPr>
           <a:xfrm>
-            <a:off x="594360" y="2980944"/>
-            <a:ext cx="11002975" cy="347472"/>
-          </a:xfrm>
-          <a:prstGeom prst="rect">
-            <a:avLst/>
-          </a:prstGeom>
-          <a:noFill/>
-        </p:spPr>
-        <p:txBody>
-          <a:bodyPr wrap="square">
-            <a:spAutoFit/>
-          </a:bodyPr>
-          <a:lstStyle/>
-          <a:p>
-            <a:pPr algn="ctr"/>
-            <a:r>
-              <a:rPr sz="2200" b="0" i="1">
-                <a:solidFill>
-                  <a:srgbClr val="8C8C8C"/>
-                </a:solidFill>
-                <a:latin typeface="Arial"/>
-              </a:rPr>
-              <a:t/>
-            </a:r>
-          </a:p>
-        </p:txBody>
-      </p:sp>
-      <p:sp>
-        <p:nvSpPr>
-          <p:cNvPr id="4" name="TextBox 3"/>
-          <p:cNvSpPr txBox="1"/>
-          <p:nvPr/>
-        </p:nvSpPr>
-        <p:spPr>
-          <a:xfrm>
-            <a:off x="594360" y="3529584"/>
-            <a:ext cx="11002975" cy="685800"/>
-          </a:xfrm>
-          <a:prstGeom prst="rect">
-            <a:avLst/>
-          </a:prstGeom>
-          <a:noFill/>
-        </p:spPr>
-        <p:txBody>
-          <a:bodyPr wrap="square">
-            <a:spAutoFit/>
-          </a:bodyPr>
-          <a:lstStyle/>
-          <a:p>
-            <a:pPr algn="ctr"/>
-            <a:r>
-              <a:rPr sz="4400" b="1" i="0">
+            <a:off x="640080" y="2985516"/>
+            <a:ext cx="10911535" cy="731520"/>
+          </a:xfrm>
+          <a:prstGeom prst="rect">
+            <a:avLst/>
+          </a:prstGeom>
+          <a:noFill/>
+        </p:spPr>
+        <p:txBody>
+          <a:bodyPr wrap="square">
+            <a:spAutoFit/>
+          </a:bodyPr>
+          <a:lstStyle/>
+          <a:p>
+            <a:pPr algn="ctr"/>
+            <a:r>
+              <a:rPr sz="4800" b="1" i="0">
                 <a:solidFill>
                   <a:srgbClr val="FFFFFF"/>
                 </a:solidFill>
                 <a:latin typeface="Arial"/>
               </a:rPr>
               <a:t>Quando o meu medo me paralisa</a:t>
-            </a:r>
-          </a:p>
-        </p:txBody>
-      </p:sp>
-      <p:sp>
-        <p:nvSpPr>
-          <p:cNvPr id="5" name="TextBox 4"/>
-          <p:cNvSpPr txBox="1"/>
-          <p:nvPr/>
-        </p:nvSpPr>
-        <p:spPr>
-          <a:xfrm>
-            <a:off x="594360" y="4251960"/>
-            <a:ext cx="11002975" cy="347472"/>
-          </a:xfrm>
-          <a:prstGeom prst="rect">
-            <a:avLst/>
-          </a:prstGeom>
-          <a:noFill/>
-        </p:spPr>
-        <p:txBody>
-          <a:bodyPr wrap="square">
-            <a:spAutoFit/>
-          </a:bodyPr>
-          <a:lstStyle/>
-          <a:p>
-            <a:pPr algn="ctr"/>
-            <a:r>
-              <a:rPr sz="2200" b="0" i="1">
-                <a:solidFill>
-                  <a:srgbClr val="8C8C8C"/>
-                </a:solidFill>
-                <a:latin typeface="Arial"/>
-              </a:rPr>
-              <a:t/>
             </a:r>
           </a:p>
         </p:txBody>
@@ -7683,23 +6493,23 @@
         </p:nvSpPr>
         <p:spPr>
           <a:xfrm>
-            <a:off x="594360" y="2258568"/>
-            <a:ext cx="11002975" cy="685800"/>
-          </a:xfrm>
-          <a:prstGeom prst="rect">
-            <a:avLst/>
-          </a:prstGeom>
-          <a:noFill/>
-        </p:spPr>
-        <p:txBody>
-          <a:bodyPr wrap="square">
-            <a:spAutoFit/>
-          </a:bodyPr>
-          <a:lstStyle/>
-          <a:p>
-            <a:pPr algn="ctr"/>
-            <a:r>
-              <a:rPr sz="4400" b="1" i="0">
+            <a:off x="640080" y="2052828"/>
+            <a:ext cx="10911535" cy="731520"/>
+          </a:xfrm>
+          <a:prstGeom prst="rect">
+            <a:avLst/>
+          </a:prstGeom>
+          <a:noFill/>
+        </p:spPr>
+        <p:txBody>
+          <a:bodyPr wrap="square">
+            <a:spAutoFit/>
+          </a:bodyPr>
+          <a:lstStyle/>
+          <a:p>
+            <a:pPr algn="ctr"/>
+            <a:r>
+              <a:rPr sz="4800" b="1" i="0">
                 <a:solidFill>
                   <a:srgbClr val="FFFFFF"/>
                 </a:solidFill>
@@ -7718,99 +6528,29 @@
         </p:nvSpPr>
         <p:spPr>
           <a:xfrm>
-            <a:off x="594360" y="2980944"/>
-            <a:ext cx="11002975" cy="347472"/>
-          </a:xfrm>
-          <a:prstGeom prst="rect">
-            <a:avLst/>
-          </a:prstGeom>
-          <a:noFill/>
-        </p:spPr>
-        <p:txBody>
-          <a:bodyPr wrap="square">
-            <a:spAutoFit/>
-          </a:bodyPr>
-          <a:lstStyle/>
-          <a:p>
-            <a:pPr algn="ctr"/>
-            <a:r>
-              <a:rPr sz="2200" b="0" i="1">
-                <a:solidFill>
-                  <a:srgbClr val="8C8C8C"/>
-                </a:solidFill>
-                <a:latin typeface="Arial"/>
-              </a:rPr>
-              <a:t/>
-            </a:r>
-          </a:p>
-        </p:txBody>
-      </p:sp>
-      <p:sp>
-        <p:nvSpPr>
-          <p:cNvPr id="4" name="TextBox 3"/>
-          <p:cNvSpPr txBox="1"/>
-          <p:nvPr/>
-        </p:nvSpPr>
-        <p:spPr>
-          <a:xfrm>
-            <a:off x="594360" y="3529584"/>
-            <a:ext cx="11002975" cy="685800"/>
-          </a:xfrm>
-          <a:prstGeom prst="rect">
-            <a:avLst/>
-          </a:prstGeom>
-          <a:noFill/>
-        </p:spPr>
-        <p:txBody>
-          <a:bodyPr wrap="square">
-            <a:spAutoFit/>
-          </a:bodyPr>
-          <a:lstStyle/>
-          <a:p>
-            <a:pPr algn="ctr"/>
-            <a:r>
-              <a:rPr sz="4400" b="1" i="0">
+            <a:off x="640080" y="2985516"/>
+            <a:ext cx="10911535" cy="731520"/>
+          </a:xfrm>
+          <a:prstGeom prst="rect">
+            <a:avLst/>
+          </a:prstGeom>
+          <a:noFill/>
+        </p:spPr>
+        <p:txBody>
+          <a:bodyPr wrap="square">
+            <a:spAutoFit/>
+          </a:bodyPr>
+          <a:lstStyle/>
+          <a:p>
+            <a:pPr algn="ctr"/>
+            <a:r>
+              <a:rPr sz="4800" b="1" i="0">
                 <a:solidFill>
                   <a:srgbClr val="FFFFFF"/>
                 </a:solidFill>
                 <a:latin typeface="Arial"/>
               </a:rPr>
               <a:t>Tu és a razão pela qual eu canto</a:t>
-            </a:r>
-          </a:p>
-        </p:txBody>
-      </p:sp>
-      <p:sp>
-        <p:nvSpPr>
-          <p:cNvPr id="5" name="TextBox 4"/>
-          <p:cNvSpPr txBox="1"/>
-          <p:nvPr/>
-        </p:nvSpPr>
-        <p:spPr>
-          <a:xfrm>
-            <a:off x="594360" y="4251960"/>
-            <a:ext cx="11002975" cy="347472"/>
-          </a:xfrm>
-          <a:prstGeom prst="rect">
-            <a:avLst/>
-          </a:prstGeom>
-          <a:noFill/>
-        </p:spPr>
-        <p:txBody>
-          <a:bodyPr wrap="square">
-            <a:spAutoFit/>
-          </a:bodyPr>
-          <a:lstStyle/>
-          <a:p>
-            <a:pPr algn="ctr"/>
-            <a:r>
-              <a:rPr sz="2200" b="0" i="1">
-                <a:solidFill>
-                  <a:srgbClr val="8C8C8C"/>
-                </a:solidFill>
-                <a:latin typeface="Arial"/>
-              </a:rPr>
-              <a:t/>
             </a:r>
           </a:p>
         </p:txBody>

--- a/output_pptx/Forever_Reign.pptx
+++ b/output_pptx/Forever_Reign.pptx
@@ -3193,6 +3193,76 @@
           </a:p>
         </p:txBody>
       </p:sp>
+      <p:sp>
+        <p:nvSpPr>
+          <p:cNvPr id="4" name="TextBox 3"/>
+          <p:cNvSpPr txBox="1"/>
+          <p:nvPr/>
+        </p:nvSpPr>
+        <p:spPr>
+          <a:xfrm>
+            <a:off x="640080" y="4128516"/>
+            <a:ext cx="10911535" cy="310896"/>
+          </a:xfrm>
+          <a:prstGeom prst="rect">
+            <a:avLst/>
+          </a:prstGeom>
+          <a:noFill/>
+        </p:spPr>
+        <p:txBody>
+          <a:bodyPr wrap="square">
+            <a:spAutoFit/>
+          </a:bodyPr>
+          <a:lstStyle/>
+          <a:p>
+            <a:pPr algn="ctr"/>
+            <a:r>
+              <a:rPr sz="2000" b="0" i="0">
+                <a:solidFill>
+                  <a:srgbClr val="828282"/>
+                </a:solidFill>
+                <a:latin typeface="Arial"/>
+              </a:rPr>
+              <a:t>いつも支配する</a:t>
+            </a:r>
+          </a:p>
+        </p:txBody>
+      </p:sp>
+      <p:sp>
+        <p:nvSpPr>
+          <p:cNvPr id="5" name="TextBox 4"/>
+          <p:cNvSpPr txBox="1"/>
+          <p:nvPr/>
+        </p:nvSpPr>
+        <p:spPr>
+          <a:xfrm>
+            <a:off x="640080" y="4494276"/>
+            <a:ext cx="10911535" cy="310896"/>
+          </a:xfrm>
+          <a:prstGeom prst="rect">
+            <a:avLst/>
+          </a:prstGeom>
+          <a:noFill/>
+        </p:spPr>
+        <p:txBody>
+          <a:bodyPr wrap="square">
+            <a:spAutoFit/>
+          </a:bodyPr>
+          <a:lstStyle/>
+          <a:p>
+            <a:pPr algn="ctr"/>
+            <a:r>
+              <a:rPr sz="2000" b="0" i="0">
+                <a:solidFill>
+                  <a:srgbClr val="828282"/>
+                </a:solidFill>
+                <a:latin typeface="Arial"/>
+              </a:rPr>
+              <a:t>私の中に良いものが何もないとき</a:t>
+            </a:r>
+          </a:p>
+        </p:txBody>
+      </p:sp>
     </p:spTree>
   </p:cSld>
   <p:clrMapOvr>
@@ -3254,6 +3324,41 @@
           </a:p>
         </p:txBody>
       </p:sp>
+      <p:sp>
+        <p:nvSpPr>
+          <p:cNvPr id="3" name="TextBox 2"/>
+          <p:cNvSpPr txBox="1"/>
+          <p:nvPr/>
+        </p:nvSpPr>
+        <p:spPr>
+          <a:xfrm>
+            <a:off x="640080" y="3845052"/>
+            <a:ext cx="10911535" cy="310896"/>
+          </a:xfrm>
+          <a:prstGeom prst="rect">
+            <a:avLst/>
+          </a:prstGeom>
+          <a:noFill/>
+        </p:spPr>
+        <p:txBody>
+          <a:bodyPr wrap="square">
+            <a:spAutoFit/>
+          </a:bodyPr>
+          <a:lstStyle/>
+          <a:p>
+            <a:pPr algn="ctr"/>
+            <a:r>
+              <a:rPr sz="2000" b="0" i="0">
+                <a:solidFill>
+                  <a:srgbClr val="828282"/>
+                </a:solidFill>
+                <a:latin typeface="Arial"/>
+              </a:rPr>
+              <a:t>あなたは命です、あなたは命です</a:t>
+            </a:r>
+          </a:p>
+        </p:txBody>
+      </p:sp>
     </p:spTree>
   </p:cSld>
   <p:clrMapOvr>
@@ -3848,6 +3953,76 @@
           </a:p>
         </p:txBody>
       </p:sp>
+      <p:sp>
+        <p:nvSpPr>
+          <p:cNvPr id="4" name="TextBox 3"/>
+          <p:cNvSpPr txBox="1"/>
+          <p:nvPr/>
+        </p:nvSpPr>
+        <p:spPr>
+          <a:xfrm>
+            <a:off x="640080" y="4128516"/>
+            <a:ext cx="10911535" cy="310896"/>
+          </a:xfrm>
+          <a:prstGeom prst="rect">
+            <a:avLst/>
+          </a:prstGeom>
+          <a:noFill/>
+        </p:spPr>
+        <p:txBody>
+          <a:bodyPr wrap="square">
+            <a:spAutoFit/>
+          </a:bodyPr>
+          <a:lstStyle/>
+          <a:p>
+            <a:pPr algn="ctr"/>
+            <a:r>
+              <a:rPr sz="2000" b="0" i="0">
+                <a:solidFill>
+                  <a:srgbClr val="828282"/>
+                </a:solidFill>
+                <a:latin typeface="Arial"/>
+              </a:rPr>
+              <a:t>世の光はいつも支配する</a:t>
+            </a:r>
+          </a:p>
+        </p:txBody>
+      </p:sp>
+      <p:sp>
+        <p:nvSpPr>
+          <p:cNvPr id="5" name="TextBox 4"/>
+          <p:cNvSpPr txBox="1"/>
+          <p:nvPr/>
+        </p:nvSpPr>
+        <p:spPr>
+          <a:xfrm>
+            <a:off x="640080" y="4494276"/>
+            <a:ext cx="10911535" cy="310896"/>
+          </a:xfrm>
+          <a:prstGeom prst="rect">
+            <a:avLst/>
+          </a:prstGeom>
+          <a:noFill/>
+        </p:spPr>
+        <p:txBody>
+          <a:bodyPr wrap="square">
+            <a:spAutoFit/>
+          </a:bodyPr>
+          <a:lstStyle/>
+          <a:p>
+            <a:pPr algn="ctr"/>
+            <a:r>
+              <a:rPr sz="2000" b="0" i="0">
+                <a:solidFill>
+                  <a:srgbClr val="828282"/>
+                </a:solidFill>
+                <a:latin typeface="Arial"/>
+              </a:rPr>
+              <a:t>あなたの腕へ走っています</a:t>
+            </a:r>
+          </a:p>
+        </p:txBody>
+      </p:sp>
     </p:spTree>
   </p:cSld>
   <p:clrMapOvr>
@@ -3944,6 +4119,76 @@
           </a:p>
         </p:txBody>
       </p:sp>
+      <p:sp>
+        <p:nvSpPr>
+          <p:cNvPr id="4" name="TextBox 3"/>
+          <p:cNvSpPr txBox="1"/>
+          <p:nvPr/>
+        </p:nvSpPr>
+        <p:spPr>
+          <a:xfrm>
+            <a:off x="640080" y="4128516"/>
+            <a:ext cx="10911535" cy="310896"/>
+          </a:xfrm>
+          <a:prstGeom prst="rect">
+            <a:avLst/>
+          </a:prstGeom>
+          <a:noFill/>
+        </p:spPr>
+        <p:txBody>
+          <a:bodyPr wrap="square">
+            <a:spAutoFit/>
+          </a:bodyPr>
+          <a:lstStyle/>
+          <a:p>
+            <a:pPr algn="ctr"/>
+            <a:r>
+              <a:rPr sz="2000" b="0" i="0">
+                <a:solidFill>
+                  <a:srgbClr val="828282"/>
+                </a:solidFill>
+                <a:latin typeface="Arial"/>
+              </a:rPr>
+              <a:t>あなたの腕へ走っています</a:t>
+            </a:r>
+          </a:p>
+        </p:txBody>
+      </p:sp>
+      <p:sp>
+        <p:nvSpPr>
+          <p:cNvPr id="5" name="TextBox 4"/>
+          <p:cNvSpPr txBox="1"/>
+          <p:nvPr/>
+        </p:nvSpPr>
+        <p:spPr>
+          <a:xfrm>
+            <a:off x="640080" y="4494276"/>
+            <a:ext cx="10911535" cy="310896"/>
+          </a:xfrm>
+          <a:prstGeom prst="rect">
+            <a:avLst/>
+          </a:prstGeom>
+          <a:noFill/>
+        </p:spPr>
+        <p:txBody>
+          <a:bodyPr wrap="square">
+            <a:spAutoFit/>
+          </a:bodyPr>
+          <a:lstStyle/>
+          <a:p>
+            <a:pPr algn="ctr"/>
+            <a:r>
+              <a:rPr sz="2000" b="0" i="0">
+                <a:solidFill>
+                  <a:srgbClr val="828282"/>
+                </a:solidFill>
+                <a:latin typeface="Arial"/>
+              </a:rPr>
+              <a:t>あなたの愛の豊かさ</a:t>
+            </a:r>
+          </a:p>
+        </p:txBody>
+      </p:sp>
     </p:spTree>
   </p:cSld>
   <p:clrMapOvr>
@@ -4040,6 +4285,76 @@
           </a:p>
         </p:txBody>
       </p:sp>
+      <p:sp>
+        <p:nvSpPr>
+          <p:cNvPr id="4" name="TextBox 3"/>
+          <p:cNvSpPr txBox="1"/>
+          <p:nvPr/>
+        </p:nvSpPr>
+        <p:spPr>
+          <a:xfrm>
+            <a:off x="640080" y="4128516"/>
+            <a:ext cx="10911535" cy="310896"/>
+          </a:xfrm>
+          <a:prstGeom prst="rect">
+            <a:avLst/>
+          </a:prstGeom>
+          <a:noFill/>
+        </p:spPr>
+        <p:txBody>
+          <a:bodyPr wrap="square">
+            <a:spAutoFit/>
+          </a:bodyPr>
+          <a:lstStyle/>
+          <a:p>
+            <a:pPr algn="ctr"/>
+            <a:r>
+              <a:rPr sz="2000" b="0" i="0">
+                <a:solidFill>
+                  <a:srgbClr val="828282"/>
+                </a:solidFill>
+                <a:latin typeface="Arial"/>
+              </a:rPr>
+              <a:t>いつも十分です</a:t>
+            </a:r>
+          </a:p>
+        </p:txBody>
+      </p:sp>
+      <p:sp>
+        <p:nvSpPr>
+          <p:cNvPr id="5" name="TextBox 4"/>
+          <p:cNvSpPr txBox="1"/>
+          <p:nvPr/>
+        </p:nvSpPr>
+        <p:spPr>
+          <a:xfrm>
+            <a:off x="640080" y="4494276"/>
+            <a:ext cx="10911535" cy="310896"/>
+          </a:xfrm>
+          <a:prstGeom prst="rect">
+            <a:avLst/>
+          </a:prstGeom>
+          <a:noFill/>
+        </p:spPr>
+        <p:txBody>
+          <a:bodyPr wrap="square">
+            <a:spAutoFit/>
+          </a:bodyPr>
+          <a:lstStyle/>
+          <a:p>
+            <a:pPr algn="ctr"/>
+            <a:r>
+              <a:rPr sz="2000" b="0" i="0">
+                <a:solidFill>
+                  <a:srgbClr val="828282"/>
+                </a:solidFill>
+                <a:latin typeface="Arial"/>
+              </a:rPr>
+              <a:t>あなたの抱擁に比べるものはない</a:t>
+            </a:r>
+          </a:p>
+        </p:txBody>
+      </p:sp>
     </p:spTree>
   </p:cSld>
   <p:clrMapOvr>
@@ -4136,6 +4451,76 @@
           </a:p>
         </p:txBody>
       </p:sp>
+      <p:sp>
+        <p:nvSpPr>
+          <p:cNvPr id="4" name="TextBox 3"/>
+          <p:cNvSpPr txBox="1"/>
+          <p:nvPr/>
+        </p:nvSpPr>
+        <p:spPr>
+          <a:xfrm>
+            <a:off x="640080" y="4128516"/>
+            <a:ext cx="10911535" cy="310896"/>
+          </a:xfrm>
+          <a:prstGeom prst="rect">
+            <a:avLst/>
+          </a:prstGeom>
+          <a:noFill/>
+        </p:spPr>
+        <p:txBody>
+          <a:bodyPr wrap="square">
+            <a:spAutoFit/>
+          </a:bodyPr>
+          <a:lstStyle/>
+          <a:p>
+            <a:pPr algn="ctr"/>
+            <a:r>
+              <a:rPr sz="2000" b="0" i="0">
+                <a:solidFill>
+                  <a:srgbClr val="828282"/>
+                </a:solidFill>
+                <a:latin typeface="Arial"/>
+              </a:rPr>
+              <a:t>私の言葉は決して言うことができない</a:t>
+            </a:r>
+          </a:p>
+        </p:txBody>
+      </p:sp>
+      <p:sp>
+        <p:nvSpPr>
+          <p:cNvPr id="5" name="TextBox 4"/>
+          <p:cNvSpPr txBox="1"/>
+          <p:nvPr/>
+        </p:nvSpPr>
+        <p:spPr>
+          <a:xfrm>
+            <a:off x="640080" y="4494276"/>
+            <a:ext cx="10911535" cy="310896"/>
+          </a:xfrm>
+          <a:prstGeom prst="rect">
+            <a:avLst/>
+          </a:prstGeom>
+          <a:noFill/>
+        </p:spPr>
+        <p:txBody>
+          <a:bodyPr wrap="square">
+            <a:spAutoFit/>
+          </a:bodyPr>
+          <a:lstStyle/>
+          <a:p>
+            <a:pPr algn="ctr"/>
+            <a:r>
+              <a:rPr sz="2000" b="0" i="0">
+                <a:solidFill>
+                  <a:srgbClr val="828282"/>
+                </a:solidFill>
+                <a:latin typeface="Arial"/>
+              </a:rPr>
+              <a:t>あなたは主です、あなたは主です</a:t>
+            </a:r>
+          </a:p>
+        </p:txBody>
+      </p:sp>
     </p:spTree>
   </p:cSld>
   <p:clrMapOvr>
@@ -4232,6 +4617,76 @@
           </a:p>
         </p:txBody>
       </p:sp>
+      <p:sp>
+        <p:nvSpPr>
+          <p:cNvPr id="4" name="TextBox 3"/>
+          <p:cNvSpPr txBox="1"/>
+          <p:nvPr/>
+        </p:nvSpPr>
+        <p:spPr>
+          <a:xfrm>
+            <a:off x="640080" y="4128516"/>
+            <a:ext cx="10911535" cy="310896"/>
+          </a:xfrm>
+          <a:prstGeom prst="rect">
+            <a:avLst/>
+          </a:prstGeom>
+          <a:noFill/>
+        </p:spPr>
+        <p:txBody>
+          <a:bodyPr wrap="square">
+            <a:spAutoFit/>
+          </a:bodyPr>
+          <a:lstStyle/>
+          <a:p>
+            <a:pPr algn="ctr"/>
+            <a:r>
+              <a:rPr sz="2000" b="0" i="0">
+                <a:solidFill>
+                  <a:srgbClr val="828282"/>
+                </a:solidFill>
+                <a:latin typeface="Arial"/>
+              </a:rPr>
+              <a:t>すべての創造物が宣言する</a:t>
+            </a:r>
+          </a:p>
+        </p:txBody>
+      </p:sp>
+      <p:sp>
+        <p:nvSpPr>
+          <p:cNvPr id="5" name="TextBox 4"/>
+          <p:cNvSpPr txBox="1"/>
+          <p:nvPr/>
+        </p:nvSpPr>
+        <p:spPr>
+          <a:xfrm>
+            <a:off x="640080" y="4494276"/>
+            <a:ext cx="10911535" cy="310896"/>
+          </a:xfrm>
+          <a:prstGeom prst="rect">
+            <a:avLst/>
+          </a:prstGeom>
+          <a:noFill/>
+        </p:spPr>
+        <p:txBody>
+          <a:bodyPr wrap="square">
+            <a:spAutoFit/>
+          </a:bodyPr>
+          <a:lstStyle/>
+          <a:p>
+            <a:pPr algn="ctr"/>
+            <a:r>
+              <a:rPr sz="2000" b="0" i="0">
+                <a:solidFill>
+                  <a:srgbClr val="828282"/>
+                </a:solidFill>
+                <a:latin typeface="Arial"/>
+              </a:rPr>
+              <a:t>あなたはここにいます、あなたはここにいます</a:t>
+            </a:r>
+          </a:p>
+        </p:txBody>
+      </p:sp>
     </p:spTree>
   </p:cSld>
   <p:clrMapOvr>
@@ -4328,6 +4783,76 @@
           </a:p>
         </p:txBody>
       </p:sp>
+      <p:sp>
+        <p:nvSpPr>
+          <p:cNvPr id="4" name="TextBox 3"/>
+          <p:cNvSpPr txBox="1"/>
+          <p:nvPr/>
+        </p:nvSpPr>
+        <p:spPr>
+          <a:xfrm>
+            <a:off x="640080" y="4128516"/>
+            <a:ext cx="10911535" cy="310896"/>
+          </a:xfrm>
+          <a:prstGeom prst="rect">
+            <a:avLst/>
+          </a:prstGeom>
+          <a:noFill/>
+        </p:spPr>
+        <p:txBody>
+          <a:bodyPr wrap="square">
+            <a:spAutoFit/>
+          </a:bodyPr>
+          <a:lstStyle/>
+          <a:p>
+            <a:pPr algn="ctr"/>
+            <a:r>
+              <a:rPr sz="2000" b="0" i="0">
+                <a:solidFill>
+                  <a:srgbClr val="828282"/>
+                </a:solidFill>
+                <a:latin typeface="Arial"/>
+              </a:rPr>
+              <a:t>あなたの臨在の中で私は癒される</a:t>
+            </a:r>
+          </a:p>
+        </p:txBody>
+      </p:sp>
+      <p:sp>
+        <p:nvSpPr>
+          <p:cNvPr id="5" name="TextBox 4"/>
+          <p:cNvSpPr txBox="1"/>
+          <p:nvPr/>
+        </p:nvSpPr>
+        <p:spPr>
+          <a:xfrm>
+            <a:off x="640080" y="4494276"/>
+            <a:ext cx="10911535" cy="310896"/>
+          </a:xfrm>
+          <a:prstGeom prst="rect">
+            <a:avLst/>
+          </a:prstGeom>
+          <a:noFill/>
+        </p:spPr>
+        <p:txBody>
+          <a:bodyPr wrap="square">
+            <a:spAutoFit/>
+          </a:bodyPr>
+          <a:lstStyle/>
+          <a:p>
+            <a:pPr algn="ctr"/>
+            <a:r>
+              <a:rPr sz="2000" b="0" i="0">
+                <a:solidFill>
+                  <a:srgbClr val="828282"/>
+                </a:solidFill>
+                <a:latin typeface="Arial"/>
+              </a:rPr>
+              <a:t>あなたは神です、あなたは神です</a:t>
+            </a:r>
+          </a:p>
+        </p:txBody>
+      </p:sp>
     </p:spTree>
   </p:cSld>
   <p:clrMapOvr>
@@ -4424,6 +4949,76 @@
           </a:p>
         </p:txBody>
       </p:sp>
+      <p:sp>
+        <p:nvSpPr>
+          <p:cNvPr id="4" name="TextBox 3"/>
+          <p:cNvSpPr txBox="1"/>
+          <p:nvPr/>
+        </p:nvSpPr>
+        <p:spPr>
+          <a:xfrm>
+            <a:off x="640080" y="4128516"/>
+            <a:ext cx="10911535" cy="310896"/>
+          </a:xfrm>
+          <a:prstGeom prst="rect">
+            <a:avLst/>
+          </a:prstGeom>
+          <a:noFill/>
+        </p:spPr>
+        <p:txBody>
+          <a:bodyPr wrap="square">
+            <a:spAutoFit/>
+          </a:bodyPr>
+          <a:lstStyle/>
+          <a:p>
+            <a:pPr algn="ctr"/>
+            <a:r>
+              <a:rPr sz="2000" b="0" i="0">
+                <a:solidFill>
+                  <a:srgbClr val="828282"/>
+                </a:solidFill>
+                <a:latin typeface="Arial"/>
+              </a:rPr>
+              <a:t>みんなに見られるために露わにされて</a:t>
+            </a:r>
+          </a:p>
+        </p:txBody>
+      </p:sp>
+      <p:sp>
+        <p:nvSpPr>
+          <p:cNvPr id="5" name="TextBox 4"/>
+          <p:cNvSpPr txBox="1"/>
+          <p:nvPr/>
+        </p:nvSpPr>
+        <p:spPr>
+          <a:xfrm>
+            <a:off x="640080" y="4494276"/>
+            <a:ext cx="10911535" cy="310896"/>
+          </a:xfrm>
+          <a:prstGeom prst="rect">
+            <a:avLst/>
+          </a:prstGeom>
+          <a:noFill/>
+        </p:spPr>
+        <p:txBody>
+          <a:bodyPr wrap="square">
+            <a:spAutoFit/>
+          </a:bodyPr>
+          <a:lstStyle/>
+          <a:p>
+            <a:pPr algn="ctr"/>
+            <a:r>
+              <a:rPr sz="2000" b="0" i="0">
+                <a:solidFill>
+                  <a:srgbClr val="828282"/>
+                </a:solidFill>
+                <a:latin typeface="Arial"/>
+              </a:rPr>
+              <a:t>暗闇が近づくとき</a:t>
+            </a:r>
+          </a:p>
+        </p:txBody>
+      </p:sp>
     </p:spTree>
   </p:cSld>
   <p:clrMapOvr>
@@ -4520,6 +5115,76 @@
           </a:p>
         </p:txBody>
       </p:sp>
+      <p:sp>
+        <p:nvSpPr>
+          <p:cNvPr id="4" name="TextBox 3"/>
+          <p:cNvSpPr txBox="1"/>
+          <p:nvPr/>
+        </p:nvSpPr>
+        <p:spPr>
+          <a:xfrm>
+            <a:off x="640080" y="4128516"/>
+            <a:ext cx="10911535" cy="310896"/>
+          </a:xfrm>
+          <a:prstGeom prst="rect">
+            <a:avLst/>
+          </a:prstGeom>
+          <a:noFill/>
+        </p:spPr>
+        <p:txBody>
+          <a:bodyPr wrap="square">
+            <a:spAutoFit/>
+          </a:bodyPr>
+          <a:lstStyle/>
+          <a:p>
+            <a:pPr algn="ctr"/>
+            <a:r>
+              <a:rPr sz="2000" b="0" i="0">
+                <a:solidFill>
+                  <a:srgbClr val="828282"/>
+                </a:solidFill>
+                <a:latin typeface="Arial"/>
+              </a:rPr>
+              <a:t>世の光はいつも支配する</a:t>
+            </a:r>
+          </a:p>
+        </p:txBody>
+      </p:sp>
+      <p:sp>
+        <p:nvSpPr>
+          <p:cNvPr id="5" name="TextBox 4"/>
+          <p:cNvSpPr txBox="1"/>
+          <p:nvPr/>
+        </p:nvSpPr>
+        <p:spPr>
+          <a:xfrm>
+            <a:off x="640080" y="4494276"/>
+            <a:ext cx="10911535" cy="310896"/>
+          </a:xfrm>
+          <a:prstGeom prst="rect">
+            <a:avLst/>
+          </a:prstGeom>
+          <a:noFill/>
+        </p:spPr>
+        <p:txBody>
+          <a:bodyPr wrap="square">
+            <a:spAutoFit/>
+          </a:bodyPr>
+          <a:lstStyle/>
+          <a:p>
+            <a:pPr algn="ctr"/>
+            <a:r>
+              <a:rPr sz="2000" b="0" i="0">
+                <a:solidFill>
+                  <a:srgbClr val="828282"/>
+                </a:solidFill>
+                <a:latin typeface="Arial"/>
+              </a:rPr>
+              <a:t>あなたはもっと大きいです、あなたはもっと大きいです</a:t>
+            </a:r>
+          </a:p>
+        </p:txBody>
+      </p:sp>
     </p:spTree>
   </p:cSld>
   <p:clrMapOvr>
@@ -4983,6 +5648,76 @@
           </a:p>
         </p:txBody>
       </p:sp>
+      <p:sp>
+        <p:nvSpPr>
+          <p:cNvPr id="4" name="TextBox 3"/>
+          <p:cNvSpPr txBox="1"/>
+          <p:nvPr/>
+        </p:nvSpPr>
+        <p:spPr>
+          <a:xfrm>
+            <a:off x="640080" y="4128516"/>
+            <a:ext cx="10911535" cy="310896"/>
+          </a:xfrm>
+          <a:prstGeom prst="rect">
+            <a:avLst/>
+          </a:prstGeom>
+          <a:noFill/>
+        </p:spPr>
+        <p:txBody>
+          <a:bodyPr wrap="square">
+            <a:spAutoFit/>
+          </a:bodyPr>
+          <a:lstStyle/>
+          <a:p>
+            <a:pPr algn="ctr"/>
+            <a:r>
+              <a:rPr sz="2000" b="0" i="0">
+                <a:solidFill>
+                  <a:srgbClr val="828282"/>
+                </a:solidFill>
+                <a:latin typeface="Arial"/>
+              </a:rPr>
+              <a:t>世の光はいつも支配する</a:t>
+            </a:r>
+          </a:p>
+        </p:txBody>
+      </p:sp>
+      <p:sp>
+        <p:nvSpPr>
+          <p:cNvPr id="5" name="TextBox 4"/>
+          <p:cNvSpPr txBox="1"/>
+          <p:nvPr/>
+        </p:nvSpPr>
+        <p:spPr>
+          <a:xfrm>
+            <a:off x="640080" y="4494276"/>
+            <a:ext cx="10911535" cy="310896"/>
+          </a:xfrm>
+          <a:prstGeom prst="rect">
+            <a:avLst/>
+          </a:prstGeom>
+          <a:noFill/>
+        </p:spPr>
+        <p:txBody>
+          <a:bodyPr wrap="square">
+            <a:spAutoFit/>
+          </a:bodyPr>
+          <a:lstStyle/>
+          <a:p>
+            <a:pPr algn="ctr"/>
+            <a:r>
+              <a:rPr sz="2000" b="0" i="0">
+                <a:solidFill>
+                  <a:srgbClr val="828282"/>
+                </a:solidFill>
+                <a:latin typeface="Arial"/>
+              </a:rPr>
+              <a:t>あなたの腕へ走っています</a:t>
+            </a:r>
+          </a:p>
+        </p:txBody>
+      </p:sp>
     </p:spTree>
   </p:cSld>
   <p:clrMapOvr>
@@ -5079,6 +5814,76 @@
           </a:p>
         </p:txBody>
       </p:sp>
+      <p:sp>
+        <p:nvSpPr>
+          <p:cNvPr id="4" name="TextBox 3"/>
+          <p:cNvSpPr txBox="1"/>
+          <p:nvPr/>
+        </p:nvSpPr>
+        <p:spPr>
+          <a:xfrm>
+            <a:off x="640080" y="4128516"/>
+            <a:ext cx="10911535" cy="310896"/>
+          </a:xfrm>
+          <a:prstGeom prst="rect">
+            <a:avLst/>
+          </a:prstGeom>
+          <a:noFill/>
+        </p:spPr>
+        <p:txBody>
+          <a:bodyPr wrap="square">
+            <a:spAutoFit/>
+          </a:bodyPr>
+          <a:lstStyle/>
+          <a:p>
+            <a:pPr algn="ctr"/>
+            <a:r>
+              <a:rPr sz="2000" b="0" i="0">
+                <a:solidFill>
+                  <a:srgbClr val="828282"/>
+                </a:solidFill>
+                <a:latin typeface="Arial"/>
+              </a:rPr>
+              <a:t>あなたの腕へ走っています</a:t>
+            </a:r>
+          </a:p>
+        </p:txBody>
+      </p:sp>
+      <p:sp>
+        <p:nvSpPr>
+          <p:cNvPr id="5" name="TextBox 4"/>
+          <p:cNvSpPr txBox="1"/>
+          <p:nvPr/>
+        </p:nvSpPr>
+        <p:spPr>
+          <a:xfrm>
+            <a:off x="640080" y="4494276"/>
+            <a:ext cx="10911535" cy="310896"/>
+          </a:xfrm>
+          <a:prstGeom prst="rect">
+            <a:avLst/>
+          </a:prstGeom>
+          <a:noFill/>
+        </p:spPr>
+        <p:txBody>
+          <a:bodyPr wrap="square">
+            <a:spAutoFit/>
+          </a:bodyPr>
+          <a:lstStyle/>
+          <a:p>
+            <a:pPr algn="ctr"/>
+            <a:r>
+              <a:rPr sz="2000" b="0" i="0">
+                <a:solidFill>
+                  <a:srgbClr val="828282"/>
+                </a:solidFill>
+                <a:latin typeface="Arial"/>
+              </a:rPr>
+              <a:t>あなたの愛の豊かさ</a:t>
+            </a:r>
+          </a:p>
+        </p:txBody>
+      </p:sp>
     </p:spTree>
   </p:cSld>
   <p:clrMapOvr>
@@ -5175,6 +5980,76 @@
           </a:p>
         </p:txBody>
       </p:sp>
+      <p:sp>
+        <p:nvSpPr>
+          <p:cNvPr id="4" name="TextBox 3"/>
+          <p:cNvSpPr txBox="1"/>
+          <p:nvPr/>
+        </p:nvSpPr>
+        <p:spPr>
+          <a:xfrm>
+            <a:off x="640080" y="4128516"/>
+            <a:ext cx="10911535" cy="310896"/>
+          </a:xfrm>
+          <a:prstGeom prst="rect">
+            <a:avLst/>
+          </a:prstGeom>
+          <a:noFill/>
+        </p:spPr>
+        <p:txBody>
+          <a:bodyPr wrap="square">
+            <a:spAutoFit/>
+          </a:bodyPr>
+          <a:lstStyle/>
+          <a:p>
+            <a:pPr algn="ctr"/>
+            <a:r>
+              <a:rPr sz="2000" b="0" i="0">
+                <a:solidFill>
+                  <a:srgbClr val="828282"/>
+                </a:solidFill>
+                <a:latin typeface="Arial"/>
+              </a:rPr>
+              <a:t>いつも十分です</a:t>
+            </a:r>
+          </a:p>
+        </p:txBody>
+      </p:sp>
+      <p:sp>
+        <p:nvSpPr>
+          <p:cNvPr id="5" name="TextBox 4"/>
+          <p:cNvSpPr txBox="1"/>
+          <p:nvPr/>
+        </p:nvSpPr>
+        <p:spPr>
+          <a:xfrm>
+            <a:off x="640080" y="4494276"/>
+            <a:ext cx="10911535" cy="310896"/>
+          </a:xfrm>
+          <a:prstGeom prst="rect">
+            <a:avLst/>
+          </a:prstGeom>
+          <a:noFill/>
+        </p:spPr>
+        <p:txBody>
+          <a:bodyPr wrap="square">
+            <a:spAutoFit/>
+          </a:bodyPr>
+          <a:lstStyle/>
+          <a:p>
+            <a:pPr algn="ctr"/>
+            <a:r>
+              <a:rPr sz="2000" b="0" i="0">
+                <a:solidFill>
+                  <a:srgbClr val="828282"/>
+                </a:solidFill>
+                <a:latin typeface="Arial"/>
+              </a:rPr>
+              <a:t>あなたの抱擁に比べるものはない</a:t>
+            </a:r>
+          </a:p>
+        </p:txBody>
+      </p:sp>
     </p:spTree>
   </p:cSld>
   <p:clrMapOvr>
@@ -5271,6 +6146,76 @@
           </a:p>
         </p:txBody>
       </p:sp>
+      <p:sp>
+        <p:nvSpPr>
+          <p:cNvPr id="4" name="TextBox 3"/>
+          <p:cNvSpPr txBox="1"/>
+          <p:nvPr/>
+        </p:nvSpPr>
+        <p:spPr>
+          <a:xfrm>
+            <a:off x="640080" y="4128516"/>
+            <a:ext cx="10911535" cy="310896"/>
+          </a:xfrm>
+          <a:prstGeom prst="rect">
+            <a:avLst/>
+          </a:prstGeom>
+          <a:noFill/>
+        </p:spPr>
+        <p:txBody>
+          <a:bodyPr wrap="square">
+            <a:spAutoFit/>
+          </a:bodyPr>
+          <a:lstStyle/>
+          <a:p>
+            <a:pPr algn="ctr"/>
+            <a:r>
+              <a:rPr sz="2000" b="0" i="0">
+                <a:solidFill>
+                  <a:srgbClr val="828282"/>
+                </a:solidFill>
+                <a:latin typeface="Arial"/>
+              </a:rPr>
+              <a:t>私の言葉は決して言うことができない</a:t>
+            </a:r>
+          </a:p>
+        </p:txBody>
+      </p:sp>
+      <p:sp>
+        <p:nvSpPr>
+          <p:cNvPr id="5" name="TextBox 4"/>
+          <p:cNvSpPr txBox="1"/>
+          <p:nvPr/>
+        </p:nvSpPr>
+        <p:spPr>
+          <a:xfrm>
+            <a:off x="640080" y="4494276"/>
+            <a:ext cx="10911535" cy="310896"/>
+          </a:xfrm>
+          <a:prstGeom prst="rect">
+            <a:avLst/>
+          </a:prstGeom>
+          <a:noFill/>
+        </p:spPr>
+        <p:txBody>
+          <a:bodyPr wrap="square">
+            <a:spAutoFit/>
+          </a:bodyPr>
+          <a:lstStyle/>
+          <a:p>
+            <a:pPr algn="ctr"/>
+            <a:r>
+              <a:rPr sz="2000" b="0" i="0">
+                <a:solidFill>
+                  <a:srgbClr val="828282"/>
+                </a:solidFill>
+                <a:latin typeface="Arial"/>
+              </a:rPr>
+              <a:t>あなたは主です、あなたは主です</a:t>
+            </a:r>
+          </a:p>
+        </p:txBody>
+      </p:sp>
     </p:spTree>
   </p:cSld>
   <p:clrMapOvr>
@@ -5367,6 +6312,76 @@
           </a:p>
         </p:txBody>
       </p:sp>
+      <p:sp>
+        <p:nvSpPr>
+          <p:cNvPr id="4" name="TextBox 3"/>
+          <p:cNvSpPr txBox="1"/>
+          <p:nvPr/>
+        </p:nvSpPr>
+        <p:spPr>
+          <a:xfrm>
+            <a:off x="640080" y="4128516"/>
+            <a:ext cx="10911535" cy="310896"/>
+          </a:xfrm>
+          <a:prstGeom prst="rect">
+            <a:avLst/>
+          </a:prstGeom>
+          <a:noFill/>
+        </p:spPr>
+        <p:txBody>
+          <a:bodyPr wrap="square">
+            <a:spAutoFit/>
+          </a:bodyPr>
+          <a:lstStyle/>
+          <a:p>
+            <a:pPr algn="ctr"/>
+            <a:r>
+              <a:rPr sz="2000" b="0" i="0">
+                <a:solidFill>
+                  <a:srgbClr val="828282"/>
+                </a:solidFill>
+                <a:latin typeface="Arial"/>
+              </a:rPr>
+              <a:t>すべての創造物が宣言する</a:t>
+            </a:r>
+          </a:p>
+        </p:txBody>
+      </p:sp>
+      <p:sp>
+        <p:nvSpPr>
+          <p:cNvPr id="5" name="TextBox 4"/>
+          <p:cNvSpPr txBox="1"/>
+          <p:nvPr/>
+        </p:nvSpPr>
+        <p:spPr>
+          <a:xfrm>
+            <a:off x="640080" y="4494276"/>
+            <a:ext cx="10911535" cy="310896"/>
+          </a:xfrm>
+          <a:prstGeom prst="rect">
+            <a:avLst/>
+          </a:prstGeom>
+          <a:noFill/>
+        </p:spPr>
+        <p:txBody>
+          <a:bodyPr wrap="square">
+            <a:spAutoFit/>
+          </a:bodyPr>
+          <a:lstStyle/>
+          <a:p>
+            <a:pPr algn="ctr"/>
+            <a:r>
+              <a:rPr sz="2000" b="0" i="0">
+                <a:solidFill>
+                  <a:srgbClr val="828282"/>
+                </a:solidFill>
+                <a:latin typeface="Arial"/>
+              </a:rPr>
+              <a:t>あなたはここにいます、あなたはここにいます</a:t>
+            </a:r>
+          </a:p>
+        </p:txBody>
+      </p:sp>
     </p:spTree>
   </p:cSld>
   <p:clrMapOvr>
@@ -5463,6 +6478,76 @@
           </a:p>
         </p:txBody>
       </p:sp>
+      <p:sp>
+        <p:nvSpPr>
+          <p:cNvPr id="4" name="TextBox 3"/>
+          <p:cNvSpPr txBox="1"/>
+          <p:nvPr/>
+        </p:nvSpPr>
+        <p:spPr>
+          <a:xfrm>
+            <a:off x="640080" y="4128516"/>
+            <a:ext cx="10911535" cy="310896"/>
+          </a:xfrm>
+          <a:prstGeom prst="rect">
+            <a:avLst/>
+          </a:prstGeom>
+          <a:noFill/>
+        </p:spPr>
+        <p:txBody>
+          <a:bodyPr wrap="square">
+            <a:spAutoFit/>
+          </a:bodyPr>
+          <a:lstStyle/>
+          <a:p>
+            <a:pPr algn="ctr"/>
+            <a:r>
+              <a:rPr sz="2000" b="0" i="0">
+                <a:solidFill>
+                  <a:srgbClr val="828282"/>
+                </a:solidFill>
+                <a:latin typeface="Arial"/>
+              </a:rPr>
+              <a:t>あなたの臨在の中で私は癒される</a:t>
+            </a:r>
+          </a:p>
+        </p:txBody>
+      </p:sp>
+      <p:sp>
+        <p:nvSpPr>
+          <p:cNvPr id="5" name="TextBox 4"/>
+          <p:cNvSpPr txBox="1"/>
+          <p:nvPr/>
+        </p:nvSpPr>
+        <p:spPr>
+          <a:xfrm>
+            <a:off x="640080" y="4494276"/>
+            <a:ext cx="10911535" cy="310896"/>
+          </a:xfrm>
+          <a:prstGeom prst="rect">
+            <a:avLst/>
+          </a:prstGeom>
+          <a:noFill/>
+        </p:spPr>
+        <p:txBody>
+          <a:bodyPr wrap="square">
+            <a:spAutoFit/>
+          </a:bodyPr>
+          <a:lstStyle/>
+          <a:p>
+            <a:pPr algn="ctr"/>
+            <a:r>
+              <a:rPr sz="2000" b="0" i="0">
+                <a:solidFill>
+                  <a:srgbClr val="828282"/>
+                </a:solidFill>
+                <a:latin typeface="Arial"/>
+              </a:rPr>
+              <a:t>あなたは神です、あなたは神です</a:t>
+            </a:r>
+          </a:p>
+        </p:txBody>
+      </p:sp>
     </p:spTree>
   </p:cSld>
   <p:clrMapOvr>
@@ -5524,6 +6609,41 @@
           </a:p>
         </p:txBody>
       </p:sp>
+      <p:sp>
+        <p:nvSpPr>
+          <p:cNvPr id="3" name="TextBox 2"/>
+          <p:cNvSpPr txBox="1"/>
+          <p:nvPr/>
+        </p:nvSpPr>
+        <p:spPr>
+          <a:xfrm>
+            <a:off x="640080" y="3845052"/>
+            <a:ext cx="10911535" cy="310896"/>
+          </a:xfrm>
+          <a:prstGeom prst="rect">
+            <a:avLst/>
+          </a:prstGeom>
+          <a:noFill/>
+        </p:spPr>
+        <p:txBody>
+          <a:bodyPr wrap="square">
+            <a:spAutoFit/>
+          </a:bodyPr>
+          <a:lstStyle/>
+          <a:p>
+            <a:pPr algn="ctr"/>
+            <a:r>
+              <a:rPr sz="2000" b="0" i="0">
+                <a:solidFill>
+                  <a:srgbClr val="828282"/>
+                </a:solidFill>
+                <a:latin typeface="Arial"/>
+              </a:rPr>
+              <a:t>あなたは希望です、あなたは希望です</a:t>
+            </a:r>
+          </a:p>
+        </p:txBody>
+      </p:sp>
     </p:spTree>
   </p:cSld>
   <p:clrMapOvr>
@@ -6459,6 +7579,76 @@
           </a:p>
         </p:txBody>
       </p:sp>
+      <p:sp>
+        <p:nvSpPr>
+          <p:cNvPr id="4" name="TextBox 3"/>
+          <p:cNvSpPr txBox="1"/>
+          <p:nvPr/>
+        </p:nvSpPr>
+        <p:spPr>
+          <a:xfrm>
+            <a:off x="640080" y="4128516"/>
+            <a:ext cx="10911535" cy="310896"/>
+          </a:xfrm>
+          <a:prstGeom prst="rect">
+            <a:avLst/>
+          </a:prstGeom>
+          <a:noFill/>
+        </p:spPr>
+        <p:txBody>
+          <a:bodyPr wrap="square">
+            <a:spAutoFit/>
+          </a:bodyPr>
+          <a:lstStyle/>
+          <a:p>
+            <a:pPr algn="ctr"/>
+            <a:r>
+              <a:rPr sz="2000" b="0" i="0">
+                <a:solidFill>
+                  <a:srgbClr val="828282"/>
+                </a:solidFill>
+                <a:latin typeface="Arial"/>
+              </a:rPr>
+              <a:t>あなたは私のすべての罪を覆われた</a:t>
+            </a:r>
+          </a:p>
+        </p:txBody>
+      </p:sp>
+      <p:sp>
+        <p:nvSpPr>
+          <p:cNvPr id="5" name="TextBox 4"/>
+          <p:cNvSpPr txBox="1"/>
+          <p:nvPr/>
+        </p:nvSpPr>
+        <p:spPr>
+          <a:xfrm>
+            <a:off x="640080" y="4494276"/>
+            <a:ext cx="10911535" cy="310896"/>
+          </a:xfrm>
+          <a:prstGeom prst="rect">
+            <a:avLst/>
+          </a:prstGeom>
+          <a:noFill/>
+        </p:spPr>
+        <p:txBody>
+          <a:bodyPr wrap="square">
+            <a:spAutoFit/>
+          </a:bodyPr>
+          <a:lstStyle/>
+          <a:p>
+            <a:pPr algn="ctr"/>
+            <a:r>
+              <a:rPr sz="2000" b="0" i="0">
+                <a:solidFill>
+                  <a:srgbClr val="828282"/>
+                </a:solidFill>
+                <a:latin typeface="Arial"/>
+              </a:rPr>
+              <a:t>私の恐れが私を麻痺させるとき</a:t>
+            </a:r>
+          </a:p>
+        </p:txBody>
+      </p:sp>
     </p:spTree>
   </p:cSld>
   <p:clrMapOvr>
@@ -6551,6 +7741,76 @@
                 <a:latin typeface="Arial"/>
               </a:rPr>
               <a:t>Tu és a razão pela qual eu canto</a:t>
+            </a:r>
+          </a:p>
+        </p:txBody>
+      </p:sp>
+      <p:sp>
+        <p:nvSpPr>
+          <p:cNvPr id="4" name="TextBox 3"/>
+          <p:cNvSpPr txBox="1"/>
+          <p:nvPr/>
+        </p:nvSpPr>
+        <p:spPr>
+          <a:xfrm>
+            <a:off x="640080" y="4128516"/>
+            <a:ext cx="10911535" cy="310896"/>
+          </a:xfrm>
+          <a:prstGeom prst="rect">
+            <a:avLst/>
+          </a:prstGeom>
+          <a:noFill/>
+        </p:spPr>
+        <p:txBody>
+          <a:bodyPr wrap="square">
+            <a:spAutoFit/>
+          </a:bodyPr>
+          <a:lstStyle/>
+          <a:p>
+            <a:pPr algn="ctr"/>
+            <a:r>
+              <a:rPr sz="2000" b="0" i="0">
+                <a:solidFill>
+                  <a:srgbClr val="828282"/>
+                </a:solidFill>
+                <a:latin typeface="Arial"/>
+              </a:rPr>
+              <a:t>私の人生がさまよっているときさえも</a:t>
+            </a:r>
+          </a:p>
+        </p:txBody>
+      </p:sp>
+      <p:sp>
+        <p:nvSpPr>
+          <p:cNvPr id="5" name="TextBox 4"/>
+          <p:cNvSpPr txBox="1"/>
+          <p:nvPr/>
+        </p:nvSpPr>
+        <p:spPr>
+          <a:xfrm>
+            <a:off x="640080" y="4494276"/>
+            <a:ext cx="10911535" cy="310896"/>
+          </a:xfrm>
+          <a:prstGeom prst="rect">
+            <a:avLst/>
+          </a:prstGeom>
+          <a:noFill/>
+        </p:spPr>
+        <p:txBody>
+          <a:bodyPr wrap="square">
+            <a:spAutoFit/>
+          </a:bodyPr>
+          <a:lstStyle/>
+          <a:p>
+            <a:pPr algn="ctr"/>
+            <a:r>
+              <a:rPr sz="2000" b="0" i="0">
+                <a:solidFill>
+                  <a:srgbClr val="828282"/>
+                </a:solidFill>
+                <a:latin typeface="Arial"/>
+              </a:rPr>
+              <a:t>あなたは私が歌う理由です</a:t>
             </a:r>
           </a:p>
         </p:txBody>
